--- a/index/designs/y8-l7/l2-text1-yibian/l2-text1-yibian.pptx
+++ b/index/designs/y8-l7/l2-text1-yibian/l2-text1-yibian.pptx
@@ -2187,15 +2187,6 @@
               </a:rPr>
               <a:t>一边</a:t>
             </a:r>
-            <a:pPr algn="l" indent="0" marL="0">
-              <a:lnSpc>
-                <a:spcPts val="5940"/>
-              </a:lnSpc>
-              <a:spcAft>
-                <a:spcPts val="1000"/>
-              </a:spcAft>
-              <a:buNone/>
-            </a:pPr>
             <a:r>
               <a:rPr lang="en-US" sz="5400" b="1" dirty="0">
                 <a:solidFill>
@@ -2207,15 +2198,6 @@
               </a:rPr>
               <a:t>……</a:t>
             </a:r>
-            <a:pPr algn="l" indent="0" marL="0">
-              <a:lnSpc>
-                <a:spcPts val="5940"/>
-              </a:lnSpc>
-              <a:spcAft>
-                <a:spcPts val="1000"/>
-              </a:spcAft>
-              <a:buNone/>
-            </a:pPr>
             <a:endParaRPr lang="en-US" sz="5400" dirty="0"/>
           </a:p>
           <a:p>
@@ -2421,12 +2403,6 @@
               </a:rPr>
               <a:t>一边</a:t>
             </a:r>
-            <a:pPr algn="ctr" indent="0" marL="0">
-              <a:lnSpc>
-                <a:spcPts val="4500"/>
-              </a:lnSpc>
-              <a:buNone/>
-            </a:pPr>
             <a:r>
               <a:rPr lang="en-US" sz="3000" dirty="0">
                 <a:solidFill>
@@ -2439,12 +2415,6 @@
               <a:t> X，
 </a:t>
             </a:r>
-            <a:pPr algn="ctr" indent="0" marL="0">
-              <a:lnSpc>
-                <a:spcPts val="4500"/>
-              </a:lnSpc>
-              <a:buNone/>
-            </a:pPr>
             <a:r>
               <a:rPr lang="en-US" sz="3000" b="1" dirty="0">
                 <a:solidFill>
@@ -2456,12 +2426,6 @@
               </a:rPr>
               <a:t>一边</a:t>
             </a:r>
-            <a:pPr algn="ctr" indent="0" marL="0">
-              <a:lnSpc>
-                <a:spcPts val="4500"/>
-              </a:lnSpc>
-              <a:buNone/>
-            </a:pPr>
             <a:r>
               <a:rPr lang="en-US" sz="3000" dirty="0">
                 <a:solidFill>
@@ -2547,12 +2511,6 @@
               </a:rPr>
               <a:t>doing X </a:t>
             </a:r>
-            <a:pPr algn="ctr" indent="0" marL="0">
-              <a:lnSpc>
-                <a:spcPts val="1815"/>
-              </a:lnSpc>
-              <a:buNone/>
-            </a:pPr>
             <a:r>
               <a:rPr lang="en-US" sz="1100" i="1" dirty="0">
                 <a:solidFill>
@@ -2564,12 +2522,6 @@
               </a:rPr>
               <a:t>while</a:t>
             </a:r>
-            <a:pPr algn="ctr" indent="0" marL="0">
-              <a:lnSpc>
-                <a:spcPts val="1815"/>
-              </a:lnSpc>
-              <a:buNone/>
-            </a:pPr>
             <a:r>
               <a:rPr lang="en-US" sz="1100" dirty="0">
                 <a:solidFill>
@@ -3187,9 +3139,6 @@
               </a:rPr>
               <a:t>Order: </a:t>
             </a:r>
-            <a:pPr algn="l" indent="0" marL="0">
-              <a:buNone/>
-            </a:pPr>
             <a:r>
               <a:rPr lang="en-US" sz="900" b="1" dirty="0">
                 <a:solidFill>
@@ -3201,9 +3150,6 @@
               </a:rPr>
               <a:t>Subject</a:t>
             </a:r>
-            <a:pPr algn="l" indent="0" marL="0">
-              <a:buNone/>
-            </a:pPr>
             <a:r>
               <a:rPr lang="en-US" sz="900" dirty="0">
                 <a:solidFill>
@@ -7021,9 +6967,6 @@
               </a:rPr>
               <a:t>我喜欢</a:t>
             </a:r>
-            <a:pPr algn="l" indent="0" marL="0">
-              <a:buNone/>
-            </a:pPr>
             <a:r>
               <a:rPr lang="en-US" sz="1300" b="1" dirty="0">
                 <a:solidFill>
@@ -7035,9 +6978,6 @@
               </a:rPr>
               <a:t>一边</a:t>
             </a:r>
-            <a:pPr algn="l" indent="0" marL="0">
-              <a:buNone/>
-            </a:pPr>
             <a:r>
               <a:rPr lang="en-US" sz="1300" dirty="0">
                 <a:solidFill>
@@ -7049,9 +6989,6 @@
               </a:rPr>
               <a:t>弹钢琴，</a:t>
             </a:r>
-            <a:pPr algn="l" indent="0" marL="0">
-              <a:buNone/>
-            </a:pPr>
             <a:r>
               <a:rPr lang="en-US" sz="1300" b="1" dirty="0">
                 <a:solidFill>
@@ -7063,9 +7000,6 @@
               </a:rPr>
               <a:t>一边</a:t>
             </a:r>
-            <a:pPr algn="l" indent="0" marL="0">
-              <a:buNone/>
-            </a:pPr>
             <a:r>
               <a:rPr lang="en-US" sz="1300" dirty="0">
                 <a:solidFill>
@@ -7960,6 +7894,131 @@
               </a:rPr>
               <a:t>Partner </a:t>
             </a:r>
+            <a:r>
+              <a:rPr lang="en-US" sz="950" b="1" dirty="0">
+                <a:solidFill>
+                  <a:srgbClr val="1E2A38"/>
+                </a:solidFill>
+                <a:latin typeface="Noto Sans SC" pitchFamily="34" charset="0"/>
+                <a:ea typeface="Noto Sans SC" pitchFamily="34" charset="-122"/>
+                <a:cs typeface="Noto Sans SC" pitchFamily="34" charset="-120"/>
+              </a:rPr>
+              <a:t>A runs</a:t>
+            </a:r>
+            <a:r>
+              <a:rPr lang="en-US" sz="950" dirty="0">
+                <a:solidFill>
+                  <a:srgbClr val="5B6677"/>
+                </a:solidFill>
+                <a:latin typeface="Noto Sans SC" pitchFamily="34" charset="0"/>
+                <a:ea typeface="Noto Sans SC" pitchFamily="34" charset="-122"/>
+                <a:cs typeface="Noto Sans SC" pitchFamily="34" charset="-120"/>
+              </a:rPr>
+              <a:t> to a sentence on the wall</a:t>
+            </a:r>
+            <a:endParaRPr lang="en-US" sz="950" dirty="0"/>
+          </a:p>
+        </p:txBody>
+      </p:sp>
+      <p:sp>
+        <p:nvSpPr>
+          <p:cNvPr id="49" name="Text 47"/>
+          <p:cNvSpPr/>
+          <p:nvPr/>
+        </p:nvSpPr>
+        <p:spPr>
+          <a:xfrm>
+            <a:off x="9130600" y="2195364"/>
+            <a:ext cx="2338399" cy="180975"/>
+          </a:xfrm>
+          <a:prstGeom prst="rect">
+            <a:avLst/>
+          </a:prstGeom>
+          <a:noFill/>
+          <a:ln/>
+        </p:spPr>
+        <p:txBody>
+          <a:bodyPr wrap="square" lIns="0" tIns="0" rIns="0" bIns="0" rtlCol="0" anchor="t"/>
+          <a:lstStyle/>
+          <a:p>
+            <a:pPr algn="ctr" indent="0" marL="0">
+              <a:buNone/>
+            </a:pPr>
+            <a:r>
+              <a:rPr lang="en-US" sz="1000" dirty="0">
+                <a:solidFill>
+                  <a:srgbClr val="D5CEBB"/>
+                </a:solidFill>
+                <a:latin typeface="Noto Sans SC" pitchFamily="34" charset="0"/>
+                <a:ea typeface="Noto Sans SC" pitchFamily="34" charset="-122"/>
+                <a:cs typeface="Noto Sans SC" pitchFamily="34" charset="-120"/>
+              </a:rPr>
+              <a:t>↓</a:t>
+            </a:r>
+            <a:endParaRPr lang="en-US" sz="1000" dirty="0"/>
+          </a:p>
+        </p:txBody>
+      </p:sp>
+      <p:sp>
+        <p:nvSpPr>
+          <p:cNvPr id="50" name="Text 48"/>
+          <p:cNvSpPr/>
+          <p:nvPr/>
+        </p:nvSpPr>
+        <p:spPr>
+          <a:xfrm>
+            <a:off x="9150986" y="2414439"/>
+            <a:ext cx="258979" cy="247650"/>
+          </a:xfrm>
+          <a:prstGeom prst="rect">
+            <a:avLst/>
+          </a:prstGeom>
+          <a:noFill/>
+          <a:ln/>
+        </p:spPr>
+        <p:txBody>
+          <a:bodyPr wrap="square" lIns="0" tIns="0" rIns="0" bIns="0" rtlCol="0" anchor="t"/>
+          <a:lstStyle/>
+          <a:p>
+            <a:pPr algn="ctr" indent="0" marL="0">
+              <a:buNone/>
+            </a:pPr>
+            <a:r>
+              <a:rPr lang="en-US" sz="1200" dirty="0">
+                <a:solidFill>
+                  <a:srgbClr val="1E2A38"/>
+                </a:solidFill>
+                <a:latin typeface="Noto Sans SC" pitchFamily="34" charset="0"/>
+                <a:ea typeface="Noto Sans SC" pitchFamily="34" charset="-122"/>
+                <a:cs typeface="Noto Sans SC" pitchFamily="34" charset="-120"/>
+              </a:rPr>
+              <a:t>👀</a:t>
+            </a:r>
+            <a:endParaRPr lang="en-US" sz="1200" dirty="0"/>
+          </a:p>
+        </p:txBody>
+      </p:sp>
+      <p:sp>
+        <p:nvSpPr>
+          <p:cNvPr id="51" name="Text 49"/>
+          <p:cNvSpPr/>
+          <p:nvPr/>
+        </p:nvSpPr>
+        <p:spPr>
+          <a:xfrm>
+            <a:off x="9508927" y="2414439"/>
+            <a:ext cx="1975890" cy="325636"/>
+          </a:xfrm>
+          <a:prstGeom prst="rect">
+            <a:avLst/>
+          </a:prstGeom>
+          <a:noFill/>
+          <a:ln/>
+        </p:spPr>
+        <p:txBody>
+          <a:bodyPr wrap="square" lIns="0" tIns="0" rIns="0" bIns="0" rtlCol="0" anchor="t"/>
+          <a:lstStyle/>
+          <a:p>
             <a:pPr algn="l" indent="0" marL="0">
               <a:lnSpc>
                 <a:spcPts val="1283"/>
@@ -7975,8 +8034,122 @@
                 <a:ea typeface="Noto Sans SC" pitchFamily="34" charset="-122"/>
                 <a:cs typeface="Noto Sans SC" pitchFamily="34" charset="-120"/>
               </a:rPr>
-              <a:t>A runs</a:t>
-            </a:r>
+              <a:t>Reads and memorises</a:t>
+            </a:r>
+            <a:r>
+              <a:rPr lang="en-US" sz="950" dirty="0">
+                <a:solidFill>
+                  <a:srgbClr val="5B6677"/>
+                </a:solidFill>
+                <a:latin typeface="Noto Sans SC" pitchFamily="34" charset="0"/>
+                <a:ea typeface="Noto Sans SC" pitchFamily="34" charset="-122"/>
+                <a:cs typeface="Noto Sans SC" pitchFamily="34" charset="-120"/>
+              </a:rPr>
+              <a:t> — no writing yet!</a:t>
+            </a:r>
+            <a:endParaRPr lang="en-US" sz="950" dirty="0"/>
+          </a:p>
+        </p:txBody>
+      </p:sp>
+      <p:sp>
+        <p:nvSpPr>
+          <p:cNvPr id="52" name="Text 50"/>
+          <p:cNvSpPr/>
+          <p:nvPr/>
+        </p:nvSpPr>
+        <p:spPr>
+          <a:xfrm>
+            <a:off x="9130600" y="2778175"/>
+            <a:ext cx="2338399" cy="180975"/>
+          </a:xfrm>
+          <a:prstGeom prst="rect">
+            <a:avLst/>
+          </a:prstGeom>
+          <a:noFill/>
+          <a:ln/>
+        </p:spPr>
+        <p:txBody>
+          <a:bodyPr wrap="square" lIns="0" tIns="0" rIns="0" bIns="0" rtlCol="0" anchor="t"/>
+          <a:lstStyle/>
+          <a:p>
+            <a:pPr algn="ctr" indent="0" marL="0">
+              <a:buNone/>
+            </a:pPr>
+            <a:r>
+              <a:rPr lang="en-US" sz="1000" dirty="0">
+                <a:solidFill>
+                  <a:srgbClr val="D5CEBB"/>
+                </a:solidFill>
+                <a:latin typeface="Noto Sans SC" pitchFamily="34" charset="0"/>
+                <a:ea typeface="Noto Sans SC" pitchFamily="34" charset="-122"/>
+                <a:cs typeface="Noto Sans SC" pitchFamily="34" charset="-120"/>
+              </a:rPr>
+              <a:t>↓</a:t>
+            </a:r>
+            <a:endParaRPr lang="en-US" sz="1000" dirty="0"/>
+          </a:p>
+        </p:txBody>
+      </p:sp>
+      <p:sp>
+        <p:nvSpPr>
+          <p:cNvPr id="53" name="Text 51"/>
+          <p:cNvSpPr/>
+          <p:nvPr/>
+        </p:nvSpPr>
+        <p:spPr>
+          <a:xfrm>
+            <a:off x="9150986" y="2997250"/>
+            <a:ext cx="258979" cy="247650"/>
+          </a:xfrm>
+          <a:prstGeom prst="rect">
+            <a:avLst/>
+          </a:prstGeom>
+          <a:noFill/>
+          <a:ln/>
+        </p:spPr>
+        <p:txBody>
+          <a:bodyPr wrap="square" lIns="0" tIns="0" rIns="0" bIns="0" rtlCol="0" anchor="t"/>
+          <a:lstStyle/>
+          <a:p>
+            <a:pPr algn="ctr" indent="0" marL="0">
+              <a:buNone/>
+            </a:pPr>
+            <a:r>
+              <a:rPr lang="en-US" sz="1200" dirty="0">
+                <a:solidFill>
+                  <a:srgbClr val="1E2A38"/>
+                </a:solidFill>
+                <a:latin typeface="Noto Sans SC" pitchFamily="34" charset="0"/>
+                <a:ea typeface="Noto Sans SC" pitchFamily="34" charset="-122"/>
+                <a:cs typeface="Noto Sans SC" pitchFamily="34" charset="-120"/>
+              </a:rPr>
+              <a:t>🔙</a:t>
+            </a:r>
+            <a:endParaRPr lang="en-US" sz="1200" dirty="0"/>
+          </a:p>
+        </p:txBody>
+      </p:sp>
+      <p:sp>
+        <p:nvSpPr>
+          <p:cNvPr id="54" name="Text 52"/>
+          <p:cNvSpPr/>
+          <p:nvPr/>
+        </p:nvSpPr>
+        <p:spPr>
+          <a:xfrm>
+            <a:off x="9508927" y="2997250"/>
+            <a:ext cx="1246772" cy="162818"/>
+          </a:xfrm>
+          <a:prstGeom prst="rect">
+            <a:avLst/>
+          </a:prstGeom>
+          <a:noFill/>
+          <a:ln/>
+        </p:spPr>
+        <p:txBody>
+          <a:bodyPr wrap="square" lIns="0" tIns="0" rIns="0" bIns="0" rtlCol="0" anchor="t"/>
+          <a:lstStyle/>
+          <a:p>
             <a:pPr algn="l" indent="0" marL="0">
               <a:lnSpc>
                 <a:spcPts val="1283"/>
@@ -7984,6 +8157,17 @@
               <a:buNone/>
             </a:pPr>
             <a:r>
+              <a:rPr lang="en-US" sz="950" b="1" dirty="0">
+                <a:solidFill>
+                  <a:srgbClr val="1E2A38"/>
+                </a:solidFill>
+                <a:latin typeface="Noto Sans SC" pitchFamily="34" charset="0"/>
+                <a:ea typeface="Noto Sans SC" pitchFamily="34" charset="-122"/>
+                <a:cs typeface="Noto Sans SC" pitchFamily="34" charset="-120"/>
+              </a:rPr>
+              <a:t>Returns</a:t>
+            </a:r>
+            <a:r>
               <a:rPr lang="en-US" sz="950" dirty="0">
                 <a:solidFill>
                   <a:srgbClr val="5B6677"/>
@@ -7992,7 +8176,7 @@
                 <a:ea typeface="Noto Sans SC" pitchFamily="34" charset="-122"/>
                 <a:cs typeface="Noto Sans SC" pitchFamily="34" charset="-120"/>
               </a:rPr>
-              <a:t> to a sentence on the wall</a:t>
+              <a:t> to partner B</a:t>
             </a:r>
             <a:endParaRPr lang="en-US" sz="950" dirty="0"/>
           </a:p>
@@ -8000,13 +8184,13 @@
       </p:sp>
       <p:sp>
         <p:nvSpPr>
-          <p:cNvPr id="49" name="Text 47"/>
-          <p:cNvSpPr/>
-          <p:nvPr/>
-        </p:nvSpPr>
-        <p:spPr>
-          <a:xfrm>
-            <a:off x="9130600" y="2195364"/>
+          <p:cNvPr id="55" name="Text 53"/>
+          <p:cNvSpPr/>
+          <p:nvPr/>
+        </p:nvSpPr>
+        <p:spPr>
+          <a:xfrm>
+            <a:off x="9130600" y="3283000"/>
             <a:ext cx="2338399" cy="180975"/>
           </a:xfrm>
           <a:prstGeom prst="rect">
@@ -8039,13 +8223,13 @@
       </p:sp>
       <p:sp>
         <p:nvSpPr>
-          <p:cNvPr id="50" name="Text 48"/>
-          <p:cNvSpPr/>
-          <p:nvPr/>
-        </p:nvSpPr>
-        <p:spPr>
-          <a:xfrm>
-            <a:off x="9150986" y="2414439"/>
+          <p:cNvPr id="56" name="Text 54"/>
+          <p:cNvSpPr/>
+          <p:nvPr/>
+        </p:nvSpPr>
+        <p:spPr>
+          <a:xfrm>
+            <a:off x="9150986" y="3502075"/>
             <a:ext cx="258979" cy="247650"/>
           </a:xfrm>
           <a:prstGeom prst="rect">
@@ -8070,7 +8254,7 @@
                 <a:ea typeface="Noto Sans SC" pitchFamily="34" charset="-122"/>
                 <a:cs typeface="Noto Sans SC" pitchFamily="34" charset="-120"/>
               </a:rPr>
-              <a:t>👀</a:t>
+              <a:t>🗣️</a:t>
             </a:r>
             <a:endParaRPr lang="en-US" sz="1200" dirty="0"/>
           </a:p>
@@ -8078,14 +8262,14 @@
       </p:sp>
       <p:sp>
         <p:nvSpPr>
-          <p:cNvPr id="51" name="Text 49"/>
-          <p:cNvSpPr/>
-          <p:nvPr/>
-        </p:nvSpPr>
-        <p:spPr>
-          <a:xfrm>
-            <a:off x="9508927" y="2414439"/>
-            <a:ext cx="1975890" cy="325636"/>
+          <p:cNvPr id="57" name="Text 55"/>
+          <p:cNvSpPr/>
+          <p:nvPr/>
+        </p:nvSpPr>
+        <p:spPr>
+          <a:xfrm>
+            <a:off x="9508927" y="3502075"/>
+            <a:ext cx="1620211" cy="162818"/>
           </a:xfrm>
           <a:prstGeom prst="rect">
             <a:avLst/>
@@ -8112,8 +8296,122 @@
                 <a:ea typeface="Noto Sans SC" pitchFamily="34" charset="-122"/>
                 <a:cs typeface="Noto Sans SC" pitchFamily="34" charset="-120"/>
               </a:rPr>
-              <a:t>Reads and memorises</a:t>
-            </a:r>
+              <a:t>Dictates</a:t>
+            </a:r>
+            <a:r>
+              <a:rPr lang="en-US" sz="950" dirty="0">
+                <a:solidFill>
+                  <a:srgbClr val="5B6677"/>
+                </a:solidFill>
+                <a:latin typeface="Noto Sans SC" pitchFamily="34" charset="0"/>
+                <a:ea typeface="Noto Sans SC" pitchFamily="34" charset="-122"/>
+                <a:cs typeface="Noto Sans SC" pitchFamily="34" charset="-120"/>
+              </a:rPr>
+              <a:t> the sentence to B</a:t>
+            </a:r>
+            <a:endParaRPr lang="en-US" sz="950" dirty="0"/>
+          </a:p>
+        </p:txBody>
+      </p:sp>
+      <p:sp>
+        <p:nvSpPr>
+          <p:cNvPr id="58" name="Text 56"/>
+          <p:cNvSpPr/>
+          <p:nvPr/>
+        </p:nvSpPr>
+        <p:spPr>
+          <a:xfrm>
+            <a:off x="9130600" y="3787825"/>
+            <a:ext cx="2338399" cy="180975"/>
+          </a:xfrm>
+          <a:prstGeom prst="rect">
+            <a:avLst/>
+          </a:prstGeom>
+          <a:noFill/>
+          <a:ln/>
+        </p:spPr>
+        <p:txBody>
+          <a:bodyPr wrap="square" lIns="0" tIns="0" rIns="0" bIns="0" rtlCol="0" anchor="t"/>
+          <a:lstStyle/>
+          <a:p>
+            <a:pPr algn="ctr" indent="0" marL="0">
+              <a:buNone/>
+            </a:pPr>
+            <a:r>
+              <a:rPr lang="en-US" sz="1000" dirty="0">
+                <a:solidFill>
+                  <a:srgbClr val="D5CEBB"/>
+                </a:solidFill>
+                <a:latin typeface="Noto Sans SC" pitchFamily="34" charset="0"/>
+                <a:ea typeface="Noto Sans SC" pitchFamily="34" charset="-122"/>
+                <a:cs typeface="Noto Sans SC" pitchFamily="34" charset="-120"/>
+              </a:rPr>
+              <a:t>↓</a:t>
+            </a:r>
+            <a:endParaRPr lang="en-US" sz="1000" dirty="0"/>
+          </a:p>
+        </p:txBody>
+      </p:sp>
+      <p:sp>
+        <p:nvSpPr>
+          <p:cNvPr id="59" name="Text 57"/>
+          <p:cNvSpPr/>
+          <p:nvPr/>
+        </p:nvSpPr>
+        <p:spPr>
+          <a:xfrm>
+            <a:off x="9150986" y="4006900"/>
+            <a:ext cx="258979" cy="247650"/>
+          </a:xfrm>
+          <a:prstGeom prst="rect">
+            <a:avLst/>
+          </a:prstGeom>
+          <a:noFill/>
+          <a:ln/>
+        </p:spPr>
+        <p:txBody>
+          <a:bodyPr wrap="square" lIns="0" tIns="0" rIns="0" bIns="0" rtlCol="0" anchor="t"/>
+          <a:lstStyle/>
+          <a:p>
+            <a:pPr algn="ctr" indent="0" marL="0">
+              <a:buNone/>
+            </a:pPr>
+            <a:r>
+              <a:rPr lang="en-US" sz="1200" dirty="0">
+                <a:solidFill>
+                  <a:srgbClr val="1E2A38"/>
+                </a:solidFill>
+                <a:latin typeface="Noto Sans SC" pitchFamily="34" charset="0"/>
+                <a:ea typeface="Noto Sans SC" pitchFamily="34" charset="-122"/>
+                <a:cs typeface="Noto Sans SC" pitchFamily="34" charset="-120"/>
+              </a:rPr>
+              <a:t>✍️</a:t>
+            </a:r>
+            <a:endParaRPr lang="en-US" sz="1200" dirty="0"/>
+          </a:p>
+        </p:txBody>
+      </p:sp>
+      <p:sp>
+        <p:nvSpPr>
+          <p:cNvPr id="60" name="Text 58"/>
+          <p:cNvSpPr/>
+          <p:nvPr/>
+        </p:nvSpPr>
+        <p:spPr>
+          <a:xfrm>
+            <a:off x="9508927" y="4006900"/>
+            <a:ext cx="1452467" cy="162818"/>
+          </a:xfrm>
+          <a:prstGeom prst="rect">
+            <a:avLst/>
+          </a:prstGeom>
+          <a:noFill/>
+          <a:ln/>
+        </p:spPr>
+        <p:txBody>
+          <a:bodyPr wrap="square" lIns="0" tIns="0" rIns="0" bIns="0" rtlCol="0" anchor="t"/>
+          <a:lstStyle/>
+          <a:p>
             <a:pPr algn="l" indent="0" marL="0">
               <a:lnSpc>
                 <a:spcPts val="1283"/>
@@ -8129,7 +8427,29 @@
                 <a:ea typeface="Noto Sans SC" pitchFamily="34" charset="-122"/>
                 <a:cs typeface="Noto Sans SC" pitchFamily="34" charset="-120"/>
               </a:rPr>
-              <a:t> — no writing yet!</a:t>
+              <a:t>B </a:t>
+            </a:r>
+            <a:r>
+              <a:rPr lang="en-US" sz="950" b="1" dirty="0">
+                <a:solidFill>
+                  <a:srgbClr val="1E2A38"/>
+                </a:solidFill>
+                <a:latin typeface="Noto Sans SC" pitchFamily="34" charset="0"/>
+                <a:ea typeface="Noto Sans SC" pitchFamily="34" charset="-122"/>
+                <a:cs typeface="Noto Sans SC" pitchFamily="34" charset="-120"/>
+              </a:rPr>
+              <a:t>writes</a:t>
+            </a:r>
+            <a:r>
+              <a:rPr lang="en-US" sz="950" dirty="0">
+                <a:solidFill>
+                  <a:srgbClr val="5B6677"/>
+                </a:solidFill>
+                <a:latin typeface="Noto Sans SC" pitchFamily="34" charset="0"/>
+                <a:ea typeface="Noto Sans SC" pitchFamily="34" charset="-122"/>
+                <a:cs typeface="Noto Sans SC" pitchFamily="34" charset="-120"/>
+              </a:rPr>
+              <a:t> it down exactly</a:t>
             </a:r>
             <a:endParaRPr lang="en-US" sz="950" dirty="0"/>
           </a:p>
@@ -8137,13 +8457,13 @@
       </p:sp>
       <p:sp>
         <p:nvSpPr>
-          <p:cNvPr id="52" name="Text 50"/>
-          <p:cNvSpPr/>
-          <p:nvPr/>
-        </p:nvSpPr>
-        <p:spPr>
-          <a:xfrm>
-            <a:off x="9130600" y="2778175"/>
+          <p:cNvPr id="61" name="Text 59"/>
+          <p:cNvSpPr/>
+          <p:nvPr/>
+        </p:nvSpPr>
+        <p:spPr>
+          <a:xfrm>
+            <a:off x="9130600" y="4292650"/>
             <a:ext cx="2338399" cy="180975"/>
           </a:xfrm>
           <a:prstGeom prst="rect">
@@ -8176,13 +8496,13 @@
       </p:sp>
       <p:sp>
         <p:nvSpPr>
-          <p:cNvPr id="53" name="Text 51"/>
-          <p:cNvSpPr/>
-          <p:nvPr/>
-        </p:nvSpPr>
-        <p:spPr>
-          <a:xfrm>
-            <a:off x="9150986" y="2997250"/>
+          <p:cNvPr id="62" name="Text 60"/>
+          <p:cNvSpPr/>
+          <p:nvPr/>
+        </p:nvSpPr>
+        <p:spPr>
+          <a:xfrm>
+            <a:off x="9150986" y="4511725"/>
             <a:ext cx="258979" cy="247650"/>
           </a:xfrm>
           <a:prstGeom prst="rect">
@@ -8207,7 +8527,7 @@
                 <a:ea typeface="Noto Sans SC" pitchFamily="34" charset="-122"/>
                 <a:cs typeface="Noto Sans SC" pitchFamily="34" charset="-120"/>
               </a:rPr>
-              <a:t>🔙</a:t>
+              <a:t>🔄</a:t>
             </a:r>
             <a:endParaRPr lang="en-US" sz="1200" dirty="0"/>
           </a:p>
@@ -8215,14 +8535,14 @@
       </p:sp>
       <p:sp>
         <p:nvSpPr>
-          <p:cNvPr id="54" name="Text 52"/>
-          <p:cNvSpPr/>
-          <p:nvPr/>
-        </p:nvSpPr>
-        <p:spPr>
-          <a:xfrm>
-            <a:off x="9508927" y="2997250"/>
-            <a:ext cx="1246772" cy="162818"/>
+          <p:cNvPr id="63" name="Text 61"/>
+          <p:cNvSpPr/>
+          <p:nvPr/>
+        </p:nvSpPr>
+        <p:spPr>
+          <a:xfrm>
+            <a:off x="9508927" y="4511725"/>
+            <a:ext cx="1657252" cy="162818"/>
           </a:xfrm>
           <a:prstGeom prst="rect">
             <a:avLst/>
@@ -8249,442 +8569,8 @@
                 <a:ea typeface="Noto Sans SC" pitchFamily="34" charset="-122"/>
                 <a:cs typeface="Noto Sans SC" pitchFamily="34" charset="-120"/>
               </a:rPr>
-              <a:t>Returns</a:t>
-            </a:r>
-            <a:pPr algn="l" indent="0" marL="0">
-              <a:lnSpc>
-                <a:spcPts val="1283"/>
-              </a:lnSpc>
-              <a:buNone/>
-            </a:pPr>
-            <a:r>
-              <a:rPr lang="en-US" sz="950" dirty="0">
-                <a:solidFill>
-                  <a:srgbClr val="5B6677"/>
-                </a:solidFill>
-                <a:latin typeface="Noto Sans SC" pitchFamily="34" charset="0"/>
-                <a:ea typeface="Noto Sans SC" pitchFamily="34" charset="-122"/>
-                <a:cs typeface="Noto Sans SC" pitchFamily="34" charset="-120"/>
-              </a:rPr>
-              <a:t> to partner B</a:t>
-            </a:r>
-            <a:endParaRPr lang="en-US" sz="950" dirty="0"/>
-          </a:p>
-        </p:txBody>
-      </p:sp>
-      <p:sp>
-        <p:nvSpPr>
-          <p:cNvPr id="55" name="Text 53"/>
-          <p:cNvSpPr/>
-          <p:nvPr/>
-        </p:nvSpPr>
-        <p:spPr>
-          <a:xfrm>
-            <a:off x="9130600" y="3283000"/>
-            <a:ext cx="2338399" cy="180975"/>
-          </a:xfrm>
-          <a:prstGeom prst="rect">
-            <a:avLst/>
-          </a:prstGeom>
-          <a:noFill/>
-          <a:ln/>
-        </p:spPr>
-        <p:txBody>
-          <a:bodyPr wrap="square" lIns="0" tIns="0" rIns="0" bIns="0" rtlCol="0" anchor="t"/>
-          <a:lstStyle/>
-          <a:p>
-            <a:pPr algn="ctr" indent="0" marL="0">
-              <a:buNone/>
-            </a:pPr>
-            <a:r>
-              <a:rPr lang="en-US" sz="1000" dirty="0">
-                <a:solidFill>
-                  <a:srgbClr val="D5CEBB"/>
-                </a:solidFill>
-                <a:latin typeface="Noto Sans SC" pitchFamily="34" charset="0"/>
-                <a:ea typeface="Noto Sans SC" pitchFamily="34" charset="-122"/>
-                <a:cs typeface="Noto Sans SC" pitchFamily="34" charset="-120"/>
-              </a:rPr>
-              <a:t>↓</a:t>
-            </a:r>
-            <a:endParaRPr lang="en-US" sz="1000" dirty="0"/>
-          </a:p>
-        </p:txBody>
-      </p:sp>
-      <p:sp>
-        <p:nvSpPr>
-          <p:cNvPr id="56" name="Text 54"/>
-          <p:cNvSpPr/>
-          <p:nvPr/>
-        </p:nvSpPr>
-        <p:spPr>
-          <a:xfrm>
-            <a:off x="9150986" y="3502075"/>
-            <a:ext cx="258979" cy="247650"/>
-          </a:xfrm>
-          <a:prstGeom prst="rect">
-            <a:avLst/>
-          </a:prstGeom>
-          <a:noFill/>
-          <a:ln/>
-        </p:spPr>
-        <p:txBody>
-          <a:bodyPr wrap="square" lIns="0" tIns="0" rIns="0" bIns="0" rtlCol="0" anchor="t"/>
-          <a:lstStyle/>
-          <a:p>
-            <a:pPr algn="ctr" indent="0" marL="0">
-              <a:buNone/>
-            </a:pPr>
-            <a:r>
-              <a:rPr lang="en-US" sz="1200" dirty="0">
-                <a:solidFill>
-                  <a:srgbClr val="1E2A38"/>
-                </a:solidFill>
-                <a:latin typeface="Noto Sans SC" pitchFamily="34" charset="0"/>
-                <a:ea typeface="Noto Sans SC" pitchFamily="34" charset="-122"/>
-                <a:cs typeface="Noto Sans SC" pitchFamily="34" charset="-120"/>
-              </a:rPr>
-              <a:t>🗣️</a:t>
-            </a:r>
-            <a:endParaRPr lang="en-US" sz="1200" dirty="0"/>
-          </a:p>
-        </p:txBody>
-      </p:sp>
-      <p:sp>
-        <p:nvSpPr>
-          <p:cNvPr id="57" name="Text 55"/>
-          <p:cNvSpPr/>
-          <p:nvPr/>
-        </p:nvSpPr>
-        <p:spPr>
-          <a:xfrm>
-            <a:off x="9508927" y="3502075"/>
-            <a:ext cx="1620211" cy="162818"/>
-          </a:xfrm>
-          <a:prstGeom prst="rect">
-            <a:avLst/>
-          </a:prstGeom>
-          <a:noFill/>
-          <a:ln/>
-        </p:spPr>
-        <p:txBody>
-          <a:bodyPr wrap="square" lIns="0" tIns="0" rIns="0" bIns="0" rtlCol="0" anchor="t"/>
-          <a:lstStyle/>
-          <a:p>
-            <a:pPr algn="l" indent="0" marL="0">
-              <a:lnSpc>
-                <a:spcPts val="1283"/>
-              </a:lnSpc>
-              <a:buNone/>
-            </a:pPr>
-            <a:r>
-              <a:rPr lang="en-US" sz="950" b="1" dirty="0">
-                <a:solidFill>
-                  <a:srgbClr val="1E2A38"/>
-                </a:solidFill>
-                <a:latin typeface="Noto Sans SC" pitchFamily="34" charset="0"/>
-                <a:ea typeface="Noto Sans SC" pitchFamily="34" charset="-122"/>
-                <a:cs typeface="Noto Sans SC" pitchFamily="34" charset="-120"/>
-              </a:rPr>
-              <a:t>Dictates</a:t>
-            </a:r>
-            <a:pPr algn="l" indent="0" marL="0">
-              <a:lnSpc>
-                <a:spcPts val="1283"/>
-              </a:lnSpc>
-              <a:buNone/>
-            </a:pPr>
-            <a:r>
-              <a:rPr lang="en-US" sz="950" dirty="0">
-                <a:solidFill>
-                  <a:srgbClr val="5B6677"/>
-                </a:solidFill>
-                <a:latin typeface="Noto Sans SC" pitchFamily="34" charset="0"/>
-                <a:ea typeface="Noto Sans SC" pitchFamily="34" charset="-122"/>
-                <a:cs typeface="Noto Sans SC" pitchFamily="34" charset="-120"/>
-              </a:rPr>
-              <a:t> the sentence to B</a:t>
-            </a:r>
-            <a:endParaRPr lang="en-US" sz="950" dirty="0"/>
-          </a:p>
-        </p:txBody>
-      </p:sp>
-      <p:sp>
-        <p:nvSpPr>
-          <p:cNvPr id="58" name="Text 56"/>
-          <p:cNvSpPr/>
-          <p:nvPr/>
-        </p:nvSpPr>
-        <p:spPr>
-          <a:xfrm>
-            <a:off x="9130600" y="3787825"/>
-            <a:ext cx="2338399" cy="180975"/>
-          </a:xfrm>
-          <a:prstGeom prst="rect">
-            <a:avLst/>
-          </a:prstGeom>
-          <a:noFill/>
-          <a:ln/>
-        </p:spPr>
-        <p:txBody>
-          <a:bodyPr wrap="square" lIns="0" tIns="0" rIns="0" bIns="0" rtlCol="0" anchor="t"/>
-          <a:lstStyle/>
-          <a:p>
-            <a:pPr algn="ctr" indent="0" marL="0">
-              <a:buNone/>
-            </a:pPr>
-            <a:r>
-              <a:rPr lang="en-US" sz="1000" dirty="0">
-                <a:solidFill>
-                  <a:srgbClr val="D5CEBB"/>
-                </a:solidFill>
-                <a:latin typeface="Noto Sans SC" pitchFamily="34" charset="0"/>
-                <a:ea typeface="Noto Sans SC" pitchFamily="34" charset="-122"/>
-                <a:cs typeface="Noto Sans SC" pitchFamily="34" charset="-120"/>
-              </a:rPr>
-              <a:t>↓</a:t>
-            </a:r>
-            <a:endParaRPr lang="en-US" sz="1000" dirty="0"/>
-          </a:p>
-        </p:txBody>
-      </p:sp>
-      <p:sp>
-        <p:nvSpPr>
-          <p:cNvPr id="59" name="Text 57"/>
-          <p:cNvSpPr/>
-          <p:nvPr/>
-        </p:nvSpPr>
-        <p:spPr>
-          <a:xfrm>
-            <a:off x="9150986" y="4006900"/>
-            <a:ext cx="258979" cy="247650"/>
-          </a:xfrm>
-          <a:prstGeom prst="rect">
-            <a:avLst/>
-          </a:prstGeom>
-          <a:noFill/>
-          <a:ln/>
-        </p:spPr>
-        <p:txBody>
-          <a:bodyPr wrap="square" lIns="0" tIns="0" rIns="0" bIns="0" rtlCol="0" anchor="t"/>
-          <a:lstStyle/>
-          <a:p>
-            <a:pPr algn="ctr" indent="0" marL="0">
-              <a:buNone/>
-            </a:pPr>
-            <a:r>
-              <a:rPr lang="en-US" sz="1200" dirty="0">
-                <a:solidFill>
-                  <a:srgbClr val="1E2A38"/>
-                </a:solidFill>
-                <a:latin typeface="Noto Sans SC" pitchFamily="34" charset="0"/>
-                <a:ea typeface="Noto Sans SC" pitchFamily="34" charset="-122"/>
-                <a:cs typeface="Noto Sans SC" pitchFamily="34" charset="-120"/>
-              </a:rPr>
-              <a:t>✍️</a:t>
-            </a:r>
-            <a:endParaRPr lang="en-US" sz="1200" dirty="0"/>
-          </a:p>
-        </p:txBody>
-      </p:sp>
-      <p:sp>
-        <p:nvSpPr>
-          <p:cNvPr id="60" name="Text 58"/>
-          <p:cNvSpPr/>
-          <p:nvPr/>
-        </p:nvSpPr>
-        <p:spPr>
-          <a:xfrm>
-            <a:off x="9508927" y="4006900"/>
-            <a:ext cx="1452467" cy="162818"/>
-          </a:xfrm>
-          <a:prstGeom prst="rect">
-            <a:avLst/>
-          </a:prstGeom>
-          <a:noFill/>
-          <a:ln/>
-        </p:spPr>
-        <p:txBody>
-          <a:bodyPr wrap="square" lIns="0" tIns="0" rIns="0" bIns="0" rtlCol="0" anchor="t"/>
-          <a:lstStyle/>
-          <a:p>
-            <a:pPr algn="l" indent="0" marL="0">
-              <a:lnSpc>
-                <a:spcPts val="1283"/>
-              </a:lnSpc>
-              <a:buNone/>
-            </a:pPr>
-            <a:r>
-              <a:rPr lang="en-US" sz="950" dirty="0">
-                <a:solidFill>
-                  <a:srgbClr val="5B6677"/>
-                </a:solidFill>
-                <a:latin typeface="Noto Sans SC" pitchFamily="34" charset="0"/>
-                <a:ea typeface="Noto Sans SC" pitchFamily="34" charset="-122"/>
-                <a:cs typeface="Noto Sans SC" pitchFamily="34" charset="-120"/>
-              </a:rPr>
-              <a:t>B </a:t>
-            </a:r>
-            <a:pPr algn="l" indent="0" marL="0">
-              <a:lnSpc>
-                <a:spcPts val="1283"/>
-              </a:lnSpc>
-              <a:buNone/>
-            </a:pPr>
-            <a:r>
-              <a:rPr lang="en-US" sz="950" b="1" dirty="0">
-                <a:solidFill>
-                  <a:srgbClr val="1E2A38"/>
-                </a:solidFill>
-                <a:latin typeface="Noto Sans SC" pitchFamily="34" charset="0"/>
-                <a:ea typeface="Noto Sans SC" pitchFamily="34" charset="-122"/>
-                <a:cs typeface="Noto Sans SC" pitchFamily="34" charset="-120"/>
-              </a:rPr>
-              <a:t>writes</a:t>
-            </a:r>
-            <a:pPr algn="l" indent="0" marL="0">
-              <a:lnSpc>
-                <a:spcPts val="1283"/>
-              </a:lnSpc>
-              <a:buNone/>
-            </a:pPr>
-            <a:r>
-              <a:rPr lang="en-US" sz="950" dirty="0">
-                <a:solidFill>
-                  <a:srgbClr val="5B6677"/>
-                </a:solidFill>
-                <a:latin typeface="Noto Sans SC" pitchFamily="34" charset="0"/>
-                <a:ea typeface="Noto Sans SC" pitchFamily="34" charset="-122"/>
-                <a:cs typeface="Noto Sans SC" pitchFamily="34" charset="-120"/>
-              </a:rPr>
-              <a:t> it down exactly</a:t>
-            </a:r>
-            <a:endParaRPr lang="en-US" sz="950" dirty="0"/>
-          </a:p>
-        </p:txBody>
-      </p:sp>
-      <p:sp>
-        <p:nvSpPr>
-          <p:cNvPr id="61" name="Text 59"/>
-          <p:cNvSpPr/>
-          <p:nvPr/>
-        </p:nvSpPr>
-        <p:spPr>
-          <a:xfrm>
-            <a:off x="9130600" y="4292650"/>
-            <a:ext cx="2338399" cy="180975"/>
-          </a:xfrm>
-          <a:prstGeom prst="rect">
-            <a:avLst/>
-          </a:prstGeom>
-          <a:noFill/>
-          <a:ln/>
-        </p:spPr>
-        <p:txBody>
-          <a:bodyPr wrap="square" lIns="0" tIns="0" rIns="0" bIns="0" rtlCol="0" anchor="t"/>
-          <a:lstStyle/>
-          <a:p>
-            <a:pPr algn="ctr" indent="0" marL="0">
-              <a:buNone/>
-            </a:pPr>
-            <a:r>
-              <a:rPr lang="en-US" sz="1000" dirty="0">
-                <a:solidFill>
-                  <a:srgbClr val="D5CEBB"/>
-                </a:solidFill>
-                <a:latin typeface="Noto Sans SC" pitchFamily="34" charset="0"/>
-                <a:ea typeface="Noto Sans SC" pitchFamily="34" charset="-122"/>
-                <a:cs typeface="Noto Sans SC" pitchFamily="34" charset="-120"/>
-              </a:rPr>
-              <a:t>↓</a:t>
-            </a:r>
-            <a:endParaRPr lang="en-US" sz="1000" dirty="0"/>
-          </a:p>
-        </p:txBody>
-      </p:sp>
-      <p:sp>
-        <p:nvSpPr>
-          <p:cNvPr id="62" name="Text 60"/>
-          <p:cNvSpPr/>
-          <p:nvPr/>
-        </p:nvSpPr>
-        <p:spPr>
-          <a:xfrm>
-            <a:off x="9150986" y="4511725"/>
-            <a:ext cx="258979" cy="247650"/>
-          </a:xfrm>
-          <a:prstGeom prst="rect">
-            <a:avLst/>
-          </a:prstGeom>
-          <a:noFill/>
-          <a:ln/>
-        </p:spPr>
-        <p:txBody>
-          <a:bodyPr wrap="square" lIns="0" tIns="0" rIns="0" bIns="0" rtlCol="0" anchor="t"/>
-          <a:lstStyle/>
-          <a:p>
-            <a:pPr algn="ctr" indent="0" marL="0">
-              <a:buNone/>
-            </a:pPr>
-            <a:r>
-              <a:rPr lang="en-US" sz="1200" dirty="0">
-                <a:solidFill>
-                  <a:srgbClr val="1E2A38"/>
-                </a:solidFill>
-                <a:latin typeface="Noto Sans SC" pitchFamily="34" charset="0"/>
-                <a:ea typeface="Noto Sans SC" pitchFamily="34" charset="-122"/>
-                <a:cs typeface="Noto Sans SC" pitchFamily="34" charset="-120"/>
-              </a:rPr>
-              <a:t>🔄</a:t>
-            </a:r>
-            <a:endParaRPr lang="en-US" sz="1200" dirty="0"/>
-          </a:p>
-        </p:txBody>
-      </p:sp>
-      <p:sp>
-        <p:nvSpPr>
-          <p:cNvPr id="63" name="Text 61"/>
-          <p:cNvSpPr/>
-          <p:nvPr/>
-        </p:nvSpPr>
-        <p:spPr>
-          <a:xfrm>
-            <a:off x="9508927" y="4511725"/>
-            <a:ext cx="1657252" cy="162818"/>
-          </a:xfrm>
-          <a:prstGeom prst="rect">
-            <a:avLst/>
-          </a:prstGeom>
-          <a:noFill/>
-          <a:ln/>
-        </p:spPr>
-        <p:txBody>
-          <a:bodyPr wrap="square" lIns="0" tIns="0" rIns="0" bIns="0" rtlCol="0" anchor="t"/>
-          <a:lstStyle/>
-          <a:p>
-            <a:pPr algn="l" indent="0" marL="0">
-              <a:lnSpc>
-                <a:spcPts val="1283"/>
-              </a:lnSpc>
-              <a:buNone/>
-            </a:pPr>
-            <a:r>
-              <a:rPr lang="en-US" sz="950" b="1" dirty="0">
-                <a:solidFill>
-                  <a:srgbClr val="1E2A38"/>
-                </a:solidFill>
-                <a:latin typeface="Noto Sans SC" pitchFamily="34" charset="0"/>
-                <a:ea typeface="Noto Sans SC" pitchFamily="34" charset="-122"/>
-                <a:cs typeface="Noto Sans SC" pitchFamily="34" charset="-120"/>
-              </a:rPr>
               <a:t>Swap</a:t>
             </a:r>
-            <a:pPr algn="l" indent="0" marL="0">
-              <a:lnSpc>
-                <a:spcPts val="1283"/>
-              </a:lnSpc>
-              <a:buNone/>
-            </a:pPr>
             <a:r>
               <a:rPr lang="en-US" sz="950" dirty="0">
                 <a:solidFill>
@@ -10661,12 +10547,6 @@
               </a:rPr>
               <a:t>我喜欢一边 </a:t>
             </a:r>
-            <a:pPr algn="l" indent="0" marL="0">
-              <a:lnSpc>
-                <a:spcPts val="2210"/>
-              </a:lnSpc>
-              <a:buNone/>
-            </a:pPr>
             <a:r>
               <a:rPr lang="en-US" sz="1300" dirty="0">
                 <a:solidFill>
@@ -11753,12 +11633,6 @@
               </a:rPr>
               <a:t>我每天读</a:t>
             </a:r>
-            <a:pPr algn="ctr" indent="0" marL="0">
-              <a:spcAft>
-                <a:spcPts val="1400"/>
-              </a:spcAft>
-              <a:buNone/>
-            </a:pPr>
             <a:r>
               <a:rPr lang="en-US" sz="2000" b="1" dirty="0">
                 <a:solidFill>
@@ -11770,12 +11644,6 @@
               </a:rPr>
               <a:t>一个小时</a:t>
             </a:r>
-            <a:pPr algn="ctr" indent="0" marL="0">
-              <a:spcAft>
-                <a:spcPts val="1400"/>
-              </a:spcAft>
-              <a:buNone/>
-            </a:pPr>
             <a:r>
               <a:rPr lang="en-US" sz="2000" dirty="0">
                 <a:solidFill>
@@ -14679,15 +14547,6 @@
               </a:rPr>
               <a:t>Teacher calls a word in </a:t>
             </a:r>
-            <a:pPr algn="l" indent="0" marL="0">
-              <a:lnSpc>
-                <a:spcPts val="1450"/>
-              </a:lnSpc>
-              <a:spcAft>
-                <a:spcPts val="600"/>
-              </a:spcAft>
-              <a:buNone/>
-            </a:pPr>
             <a:r>
               <a:rPr lang="en-US" sz="1000" b="1" dirty="0">
                 <a:solidFill>
@@ -14723,15 +14582,6 @@
               </a:rPr>
               <a:t>First student to </a:t>
             </a:r>
-            <a:pPr algn="l" indent="0" marL="0">
-              <a:lnSpc>
-                <a:spcPts val="1450"/>
-              </a:lnSpc>
-              <a:spcAft>
-                <a:spcPts val="600"/>
-              </a:spcAft>
-              <a:buNone/>
-            </a:pPr>
             <a:r>
               <a:rPr lang="en-US" sz="1000" b="1" dirty="0">
                 <a:solidFill>
@@ -14743,15 +14593,6 @@
               </a:rPr>
               <a:t>slap the correct character</a:t>
             </a:r>
-            <a:pPr algn="l" indent="0" marL="0">
-              <a:lnSpc>
-                <a:spcPts val="1450"/>
-              </a:lnSpc>
-              <a:spcAft>
-                <a:spcPts val="600"/>
-              </a:spcAft>
-              <a:buNone/>
-            </a:pPr>
             <a:r>
               <a:rPr lang="en-US" sz="1000" dirty="0">
                 <a:solidFill>
@@ -14882,12 +14723,6 @@
               </a:rPr>
               <a:t>You can already say all these hobbies! Today's character </a:t>
             </a:r>
-            <a:pPr algn="l" indent="0" marL="0">
-              <a:lnSpc>
-                <a:spcPts val="1400"/>
-              </a:lnSpc>
-              <a:buNone/>
-            </a:pPr>
             <a:r>
               <a:rPr lang="en-US" sz="1000" b="1" dirty="0">
                 <a:solidFill>
@@ -14899,12 +14734,6 @@
               </a:rPr>
               <a:t>田云</a:t>
             </a:r>
-            <a:pPr algn="l" indent="0" marL="0">
-              <a:lnSpc>
-                <a:spcPts val="1400"/>
-              </a:lnSpc>
-              <a:buNone/>
-            </a:pPr>
             <a:r>
               <a:rPr lang="en-US" sz="1000" dirty="0">
                 <a:solidFill>
@@ -15392,12 +15221,6 @@
               </a:rPr>
               <a:t>Describe doing </a:t>
             </a:r>
-            <a:pPr algn="l" indent="0" marL="0">
-              <a:lnSpc>
-                <a:spcPts val="2025"/>
-              </a:lnSpc>
-              <a:buNone/>
-            </a:pPr>
             <a:r>
               <a:rPr lang="en-US" sz="1500" b="1" dirty="0">
                 <a:solidFill>
@@ -15409,12 +15232,6 @@
               </a:rPr>
               <a:t>two things at the same time</a:t>
             </a:r>
-            <a:pPr algn="l" indent="0" marL="0">
-              <a:lnSpc>
-                <a:spcPts val="2025"/>
-              </a:lnSpc>
-              <a:buNone/>
-            </a:pPr>
             <a:r>
               <a:rPr lang="en-US" sz="1500" dirty="0">
                 <a:solidFill>
@@ -15426,12 +15243,6 @@
               </a:rPr>
               <a:t> using </a:t>
             </a:r>
-            <a:pPr algn="l" indent="0" marL="0">
-              <a:lnSpc>
-                <a:spcPts val="2025"/>
-              </a:lnSpc>
-              <a:buNone/>
-            </a:pPr>
             <a:r>
               <a:rPr lang="en-US" sz="1500" b="1" dirty="0">
                 <a:solidFill>
@@ -15558,12 +15369,6 @@
               </a:rPr>
               <a:t>I can read and understand </a:t>
             </a:r>
-            <a:pPr algn="l" indent="0" marL="0">
-              <a:lnSpc>
-                <a:spcPts val="1820"/>
-              </a:lnSpc>
-              <a:buNone/>
-            </a:pPr>
             <a:r>
               <a:rPr lang="en-US" sz="1300" b="1" dirty="0">
                 <a:solidFill>
@@ -15575,12 +15380,6 @@
               </a:rPr>
               <a:t>Text 1</a:t>
             </a:r>
-            <a:pPr algn="l" indent="0" marL="0">
-              <a:lnSpc>
-                <a:spcPts val="1820"/>
-              </a:lnSpc>
-              <a:buNone/>
-            </a:pPr>
             <a:r>
               <a:rPr lang="en-US" sz="1300" dirty="0">
                 <a:solidFill>
@@ -15592,12 +15391,6 @@
               </a:rPr>
               <a:t> — 田云's hobbies (</a:t>
             </a:r>
-            <a:pPr algn="l" indent="0" marL="0">
-              <a:lnSpc>
-                <a:spcPts val="1820"/>
-              </a:lnSpc>
-              <a:buNone/>
-            </a:pPr>
             <a:r>
               <a:rPr lang="en-US" sz="1300" dirty="0">
                 <a:solidFill>
@@ -15609,12 +15402,6 @@
               </a:rPr>
               <a:t>田云有什么爱好？</a:t>
             </a:r>
-            <a:pPr algn="l" indent="0" marL="0">
-              <a:lnSpc>
-                <a:spcPts val="1820"/>
-              </a:lnSpc>
-              <a:buNone/>
-            </a:pPr>
             <a:r>
               <a:rPr lang="en-US" sz="1300" dirty="0">
                 <a:solidFill>
@@ -15741,12 +15528,6 @@
               </a:rPr>
               <a:t>I can form </a:t>
             </a:r>
-            <a:pPr algn="l" indent="0" marL="0">
-              <a:lnSpc>
-                <a:spcPts val="1820"/>
-              </a:lnSpc>
-              <a:buNone/>
-            </a:pPr>
             <a:r>
               <a:rPr lang="en-US" sz="1300" dirty="0">
                 <a:solidFill>
@@ -15758,12 +15539,6 @@
               </a:rPr>
               <a:t>一边……一边……</a:t>
             </a:r>
-            <a:pPr algn="l" indent="0" marL="0">
-              <a:lnSpc>
-                <a:spcPts val="1820"/>
-              </a:lnSpc>
-              <a:buNone/>
-            </a:pPr>
             <a:r>
               <a:rPr lang="en-US" sz="1300" dirty="0">
                 <a:solidFill>
@@ -15775,12 +15550,6 @@
               </a:rPr>
               <a:t> sentences to describe simultaneous actions — </a:t>
             </a:r>
-            <a:pPr algn="l" indent="0" marL="0">
-              <a:lnSpc>
-                <a:spcPts val="1820"/>
-              </a:lnSpc>
-              <a:buNone/>
-            </a:pPr>
             <a:r>
               <a:rPr lang="en-US" sz="1300" dirty="0">
                 <a:solidFill>
@@ -15907,12 +15676,6 @@
               </a:rPr>
               <a:t>I can put words in the correct order in a </a:t>
             </a:r>
-            <a:pPr algn="l" indent="0" marL="0">
-              <a:lnSpc>
-                <a:spcPts val="1820"/>
-              </a:lnSpc>
-              <a:buNone/>
-            </a:pPr>
             <a:r>
               <a:rPr lang="en-US" sz="1300" dirty="0">
                 <a:solidFill>
@@ -15924,12 +15687,6 @@
               </a:rPr>
               <a:t>一边……一边……</a:t>
             </a:r>
-            <a:pPr algn="l" indent="0" marL="0">
-              <a:lnSpc>
-                <a:spcPts val="1820"/>
-              </a:lnSpc>
-              <a:buNone/>
-            </a:pPr>
             <a:r>
               <a:rPr lang="en-US" sz="1300" dirty="0">
                 <a:solidFill>
@@ -16397,12 +16154,6 @@
               </a:rPr>
               <a:t>一边</a:t>
             </a:r>
-            <a:pPr algn="ctr" indent="0" marL="0">
-              <a:lnSpc>
-                <a:spcPts val="3920"/>
-              </a:lnSpc>
-              <a:buNone/>
-            </a:pPr>
             <a:r>
               <a:rPr lang="en-US" sz="2800" dirty="0">
                 <a:solidFill>
@@ -16415,12 +16166,6 @@
               <a:t> X，
 </a:t>
             </a:r>
-            <a:pPr algn="ctr" indent="0" marL="0">
-              <a:lnSpc>
-                <a:spcPts val="3920"/>
-              </a:lnSpc>
-              <a:buNone/>
-            </a:pPr>
             <a:r>
               <a:rPr lang="en-US" sz="2800" b="1" dirty="0">
                 <a:solidFill>
@@ -16432,12 +16177,6 @@
               </a:rPr>
               <a:t>一边</a:t>
             </a:r>
-            <a:pPr algn="ctr" indent="0" marL="0">
-              <a:lnSpc>
-                <a:spcPts val="3920"/>
-              </a:lnSpc>
-              <a:buNone/>
-            </a:pPr>
             <a:r>
               <a:rPr lang="en-US" sz="2800" dirty="0">
                 <a:solidFill>
@@ -16523,12 +16262,6 @@
               </a:rPr>
               <a:t>doing X </a:t>
             </a:r>
-            <a:pPr algn="ctr" indent="0" marL="0">
-              <a:lnSpc>
-                <a:spcPts val="1600"/>
-              </a:lnSpc>
-              <a:buNone/>
-            </a:pPr>
             <a:r>
               <a:rPr lang="en-US" sz="1000" b="1" dirty="0">
                 <a:solidFill>
@@ -16540,12 +16273,6 @@
               </a:rPr>
               <a:t>while</a:t>
             </a:r>
-            <a:pPr algn="ctr" indent="0" marL="0">
-              <a:lnSpc>
-                <a:spcPts val="1600"/>
-              </a:lnSpc>
-              <a:buNone/>
-            </a:pPr>
             <a:r>
               <a:rPr lang="en-US" sz="1000" dirty="0">
                 <a:solidFill>
@@ -16788,6 +16515,238 @@
               </a:rPr>
               <a:t>我喜欢</a:t>
             </a:r>
+            <a:r>
+              <a:rPr lang="en-US" sz="1400" b="1" dirty="0">
+                <a:solidFill>
+                  <a:srgbClr val="C8943E"/>
+                </a:solidFill>
+                <a:latin typeface="Noto Serif SC" pitchFamily="34" charset="0"/>
+                <a:ea typeface="Noto Serif SC" pitchFamily="34" charset="-122"/>
+                <a:cs typeface="Noto Serif SC" pitchFamily="34" charset="-120"/>
+              </a:rPr>
+              <a:t>一边</a:t>
+            </a:r>
+            <a:r>
+              <a:rPr lang="en-US" sz="1400" dirty="0">
+                <a:solidFill>
+                  <a:srgbClr val="1E2A38"/>
+                </a:solidFill>
+                <a:latin typeface="Noto Serif SC" pitchFamily="34" charset="0"/>
+                <a:ea typeface="Noto Serif SC" pitchFamily="34" charset="-122"/>
+                <a:cs typeface="Noto Serif SC" pitchFamily="34" charset="-120"/>
+              </a:rPr>
+              <a:t>弹钢琴，</a:t>
+            </a:r>
+            <a:r>
+              <a:rPr lang="en-US" sz="1400" b="1" dirty="0">
+                <a:solidFill>
+                  <a:srgbClr val="C8943E"/>
+                </a:solidFill>
+                <a:latin typeface="Noto Serif SC" pitchFamily="34" charset="0"/>
+                <a:ea typeface="Noto Serif SC" pitchFamily="34" charset="-122"/>
+                <a:cs typeface="Noto Serif SC" pitchFamily="34" charset="-120"/>
+              </a:rPr>
+              <a:t>一边</a:t>
+            </a:r>
+            <a:r>
+              <a:rPr lang="en-US" sz="1400" dirty="0">
+                <a:solidFill>
+                  <a:srgbClr val="1E2A38"/>
+                </a:solidFill>
+                <a:latin typeface="Noto Serif SC" pitchFamily="34" charset="0"/>
+                <a:ea typeface="Noto Serif SC" pitchFamily="34" charset="-122"/>
+                <a:cs typeface="Noto Serif SC" pitchFamily="34" charset="-120"/>
+              </a:rPr>
+              <a:t>唱歌。</a:t>
+            </a:r>
+            <a:endParaRPr lang="en-US" sz="1400" dirty="0"/>
+          </a:p>
+        </p:txBody>
+      </p:sp>
+      <p:sp>
+        <p:nvSpPr>
+          <p:cNvPr id="21" name="Text 19"/>
+          <p:cNvSpPr/>
+          <p:nvPr/>
+        </p:nvSpPr>
+        <p:spPr>
+          <a:xfrm>
+            <a:off x="3755827" y="2182118"/>
+            <a:ext cx="7818093" cy="161925"/>
+          </a:xfrm>
+          <a:prstGeom prst="rect">
+            <a:avLst/>
+          </a:prstGeom>
+          <a:noFill/>
+          <a:ln/>
+        </p:spPr>
+        <p:txBody>
+          <a:bodyPr wrap="square" lIns="0" tIns="0" rIns="0" bIns="0" rtlCol="0" anchor="t"/>
+          <a:lstStyle/>
+          <a:p>
+            <a:pPr algn="l" indent="0" marL="0">
+              <a:buNone/>
+            </a:pPr>
+            <a:r>
+              <a:rPr lang="en-US" sz="900" dirty="0">
+                <a:solidFill>
+                  <a:srgbClr val="8B94A3"/>
+                </a:solidFill>
+                <a:latin typeface="Noto Sans SC" pitchFamily="34" charset="0"/>
+                <a:ea typeface="Noto Sans SC" pitchFamily="34" charset="-122"/>
+                <a:cs typeface="Noto Sans SC" pitchFamily="34" charset="-120"/>
+              </a:rPr>
+              <a:t>I like to play the piano while singing.</a:t>
+            </a:r>
+            <a:endParaRPr lang="en-US" sz="900" dirty="0"/>
+          </a:p>
+        </p:txBody>
+      </p:sp>
+      <p:sp>
+        <p:nvSpPr>
+          <p:cNvPr id="22" name="Text 20"/>
+          <p:cNvSpPr/>
+          <p:nvPr/>
+        </p:nvSpPr>
+        <p:spPr>
+          <a:xfrm>
+            <a:off x="3505051" y="2658368"/>
+            <a:ext cx="8128248" cy="785515"/>
+          </a:xfrm>
+          <a:prstGeom prst="roundRect">
+            <a:avLst>
+              <a:gd name="adj" fmla="val 12934"/>
+            </a:avLst>
+          </a:prstGeom>
+          <a:solidFill>
+            <a:srgbClr val="F6F2E8"/>
+          </a:solidFill>
+          <a:ln/>
+        </p:spPr>
+        <p:txBody>
+          <a:bodyPr wrap="square" rtlCol="0" anchor="ctr"/>
+          <a:lstStyle/>
+          <a:p>
+            <a:pPr indent="0" marL="0">
+              <a:buNone/>
+            </a:pPr>
+            <a:endParaRPr lang="en-US" dirty="0"/>
+          </a:p>
+        </p:txBody>
+      </p:sp>
+      <p:sp>
+        <p:nvSpPr>
+          <p:cNvPr id="23" name="Shape 21"/>
+          <p:cNvSpPr/>
+          <p:nvPr/>
+        </p:nvSpPr>
+        <p:spPr>
+          <a:xfrm>
+            <a:off x="3505051" y="2663130"/>
+            <a:ext cx="8128248" cy="0"/>
+          </a:xfrm>
+          <a:prstGeom prst="line">
+            <a:avLst/>
+          </a:prstGeom>
+          <a:noFill/>
+          <a:ln w="9525">
+            <a:solidFill>
+              <a:srgbClr val="E5DFD0"/>
+            </a:solidFill>
+            <a:prstDash val="solid"/>
+          </a:ln>
+        </p:spPr>
+      </p:sp>
+      <p:sp>
+        <p:nvSpPr>
+          <p:cNvPr id="24" name="Shape 22"/>
+          <p:cNvSpPr/>
+          <p:nvPr/>
+        </p:nvSpPr>
+        <p:spPr>
+          <a:xfrm>
+            <a:off x="11628537" y="2658368"/>
+            <a:ext cx="0" cy="785515"/>
+          </a:xfrm>
+          <a:prstGeom prst="line">
+            <a:avLst/>
+          </a:prstGeom>
+          <a:noFill/>
+          <a:ln w="9525">
+            <a:solidFill>
+              <a:srgbClr val="E5DFD0"/>
+            </a:solidFill>
+            <a:prstDash val="solid"/>
+          </a:ln>
+        </p:spPr>
+      </p:sp>
+      <p:sp>
+        <p:nvSpPr>
+          <p:cNvPr id="25" name="Shape 23"/>
+          <p:cNvSpPr/>
+          <p:nvPr/>
+        </p:nvSpPr>
+        <p:spPr>
+          <a:xfrm>
+            <a:off x="3505051" y="3439120"/>
+            <a:ext cx="8128248" cy="0"/>
+          </a:xfrm>
+          <a:prstGeom prst="line">
+            <a:avLst/>
+          </a:prstGeom>
+          <a:noFill/>
+          <a:ln w="9525">
+            <a:solidFill>
+              <a:srgbClr val="E5DFD0"/>
+            </a:solidFill>
+            <a:prstDash val="solid"/>
+          </a:ln>
+        </p:spPr>
+      </p:sp>
+      <p:sp>
+        <p:nvSpPr>
+          <p:cNvPr id="26" name="Shape 24"/>
+          <p:cNvSpPr/>
+          <p:nvPr/>
+        </p:nvSpPr>
+        <p:spPr>
+          <a:xfrm>
+            <a:off x="3528864" y="2658368"/>
+            <a:ext cx="0" cy="785515"/>
+          </a:xfrm>
+          <a:prstGeom prst="line">
+            <a:avLst/>
+          </a:prstGeom>
+          <a:noFill/>
+          <a:ln w="47625">
+            <a:solidFill>
+              <a:srgbClr val="C8943E"/>
+            </a:solidFill>
+            <a:prstDash val="solid"/>
+          </a:ln>
+        </p:spPr>
+      </p:sp>
+      <p:sp>
+        <p:nvSpPr>
+          <p:cNvPr id="27" name="Text 25"/>
+          <p:cNvSpPr/>
+          <p:nvPr/>
+        </p:nvSpPr>
+        <p:spPr>
+          <a:xfrm>
+            <a:off x="3755827" y="2820293"/>
+            <a:ext cx="7818093" cy="248989"/>
+          </a:xfrm>
+          <a:prstGeom prst="rect">
+            <a:avLst/>
+          </a:prstGeom>
+          <a:noFill/>
+          <a:ln/>
+        </p:spPr>
+        <p:txBody>
+          <a:bodyPr wrap="square" lIns="0" tIns="0" rIns="0" bIns="0" rtlCol="0" anchor="t"/>
+          <a:lstStyle/>
+          <a:p>
             <a:pPr algn="l" indent="0" marL="0">
               <a:lnSpc>
                 <a:spcPts val="1960"/>
@@ -16798,16 +16757,248 @@
               <a:buNone/>
             </a:pPr>
             <a:r>
-              <a:rPr lang="en-US" sz="1400" b="1" dirty="0">
-                <a:solidFill>
-                  <a:srgbClr val="C8943E"/>
+              <a:rPr lang="en-US" sz="1400" dirty="0">
+                <a:solidFill>
+                  <a:srgbClr val="1E2A38"/>
                 </a:solidFill>
                 <a:latin typeface="Noto Serif SC" pitchFamily="34" charset="0"/>
                 <a:ea typeface="Noto Serif SC" pitchFamily="34" charset="-122"/>
                 <a:cs typeface="Noto Serif SC" pitchFamily="34" charset="-120"/>
               </a:rPr>
+              <a:t>他</a:t>
+            </a:r>
+            <a:r>
+              <a:rPr lang="en-US" sz="1400" b="1" dirty="0">
+                <a:solidFill>
+                  <a:srgbClr val="C8943E"/>
+                </a:solidFill>
+                <a:latin typeface="Noto Serif SC" pitchFamily="34" charset="0"/>
+                <a:ea typeface="Noto Serif SC" pitchFamily="34" charset="-122"/>
+                <a:cs typeface="Noto Serif SC" pitchFamily="34" charset="-120"/>
+              </a:rPr>
               <a:t>一边</a:t>
             </a:r>
+            <a:r>
+              <a:rPr lang="en-US" sz="1400" dirty="0">
+                <a:solidFill>
+                  <a:srgbClr val="1E2A38"/>
+                </a:solidFill>
+                <a:latin typeface="Noto Serif SC" pitchFamily="34" charset="0"/>
+                <a:ea typeface="Noto Serif SC" pitchFamily="34" charset="-122"/>
+                <a:cs typeface="Noto Serif SC" pitchFamily="34" charset="-120"/>
+              </a:rPr>
+              <a:t>听音乐，</a:t>
+            </a:r>
+            <a:r>
+              <a:rPr lang="en-US" sz="1400" b="1" dirty="0">
+                <a:solidFill>
+                  <a:srgbClr val="C8943E"/>
+                </a:solidFill>
+                <a:latin typeface="Noto Serif SC" pitchFamily="34" charset="0"/>
+                <a:ea typeface="Noto Serif SC" pitchFamily="34" charset="-122"/>
+                <a:cs typeface="Noto Serif SC" pitchFamily="34" charset="-120"/>
+              </a:rPr>
+              <a:t>一边</a:t>
+            </a:r>
+            <a:r>
+              <a:rPr lang="en-US" sz="1400" dirty="0">
+                <a:solidFill>
+                  <a:srgbClr val="1E2A38"/>
+                </a:solidFill>
+                <a:latin typeface="Noto Serif SC" pitchFamily="34" charset="0"/>
+                <a:ea typeface="Noto Serif SC" pitchFamily="34" charset="-122"/>
+                <a:cs typeface="Noto Serif SC" pitchFamily="34" charset="-120"/>
+              </a:rPr>
+              <a:t>读书。</a:t>
+            </a:r>
+            <a:endParaRPr lang="en-US" sz="1400" dirty="0"/>
+          </a:p>
+        </p:txBody>
+      </p:sp>
+      <p:sp>
+        <p:nvSpPr>
+          <p:cNvPr id="28" name="Text 26"/>
+          <p:cNvSpPr/>
+          <p:nvPr/>
+        </p:nvSpPr>
+        <p:spPr>
+          <a:xfrm>
+            <a:off x="3755827" y="3120033"/>
+            <a:ext cx="7818093" cy="161925"/>
+          </a:xfrm>
+          <a:prstGeom prst="rect">
+            <a:avLst/>
+          </a:prstGeom>
+          <a:noFill/>
+          <a:ln/>
+        </p:spPr>
+        <p:txBody>
+          <a:bodyPr wrap="square" lIns="0" tIns="0" rIns="0" bIns="0" rtlCol="0" anchor="t"/>
+          <a:lstStyle/>
+          <a:p>
+            <a:pPr algn="l" indent="0" marL="0">
+              <a:buNone/>
+            </a:pPr>
+            <a:r>
+              <a:rPr lang="en-US" sz="900" dirty="0">
+                <a:solidFill>
+                  <a:srgbClr val="8B94A3"/>
+                </a:solidFill>
+                <a:latin typeface="Noto Sans SC" pitchFamily="34" charset="0"/>
+                <a:ea typeface="Noto Sans SC" pitchFamily="34" charset="-122"/>
+                <a:cs typeface="Noto Sans SC" pitchFamily="34" charset="-120"/>
+              </a:rPr>
+              <a:t>He listens to music while reading.</a:t>
+            </a:r>
+            <a:endParaRPr lang="en-US" sz="900" dirty="0"/>
+          </a:p>
+        </p:txBody>
+      </p:sp>
+      <p:sp>
+        <p:nvSpPr>
+          <p:cNvPr id="29" name="Text 27"/>
+          <p:cNvSpPr/>
+          <p:nvPr/>
+        </p:nvSpPr>
+        <p:spPr>
+          <a:xfrm>
+            <a:off x="3505051" y="3596283"/>
+            <a:ext cx="8128248" cy="785515"/>
+          </a:xfrm>
+          <a:prstGeom prst="roundRect">
+            <a:avLst>
+              <a:gd name="adj" fmla="val 12934"/>
+            </a:avLst>
+          </a:prstGeom>
+          <a:solidFill>
+            <a:srgbClr val="F6F2E8"/>
+          </a:solidFill>
+          <a:ln/>
+        </p:spPr>
+        <p:txBody>
+          <a:bodyPr wrap="square" rtlCol="0" anchor="ctr"/>
+          <a:lstStyle/>
+          <a:p>
+            <a:pPr indent="0" marL="0">
+              <a:buNone/>
+            </a:pPr>
+            <a:endParaRPr lang="en-US" dirty="0"/>
+          </a:p>
+        </p:txBody>
+      </p:sp>
+      <p:sp>
+        <p:nvSpPr>
+          <p:cNvPr id="30" name="Shape 28"/>
+          <p:cNvSpPr/>
+          <p:nvPr/>
+        </p:nvSpPr>
+        <p:spPr>
+          <a:xfrm>
+            <a:off x="3505051" y="3601045"/>
+            <a:ext cx="8128248" cy="0"/>
+          </a:xfrm>
+          <a:prstGeom prst="line">
+            <a:avLst/>
+          </a:prstGeom>
+          <a:noFill/>
+          <a:ln w="9525">
+            <a:solidFill>
+              <a:srgbClr val="E5DFD0"/>
+            </a:solidFill>
+            <a:prstDash val="solid"/>
+          </a:ln>
+        </p:spPr>
+      </p:sp>
+      <p:sp>
+        <p:nvSpPr>
+          <p:cNvPr id="31" name="Shape 29"/>
+          <p:cNvSpPr/>
+          <p:nvPr/>
+        </p:nvSpPr>
+        <p:spPr>
+          <a:xfrm>
+            <a:off x="11628537" y="3596283"/>
+            <a:ext cx="0" cy="785515"/>
+          </a:xfrm>
+          <a:prstGeom prst="line">
+            <a:avLst/>
+          </a:prstGeom>
+          <a:noFill/>
+          <a:ln w="9525">
+            <a:solidFill>
+              <a:srgbClr val="E5DFD0"/>
+            </a:solidFill>
+            <a:prstDash val="solid"/>
+          </a:ln>
+        </p:spPr>
+      </p:sp>
+      <p:sp>
+        <p:nvSpPr>
+          <p:cNvPr id="32" name="Shape 30"/>
+          <p:cNvSpPr/>
+          <p:nvPr/>
+        </p:nvSpPr>
+        <p:spPr>
+          <a:xfrm>
+            <a:off x="3505051" y="4377035"/>
+            <a:ext cx="8128248" cy="0"/>
+          </a:xfrm>
+          <a:prstGeom prst="line">
+            <a:avLst/>
+          </a:prstGeom>
+          <a:noFill/>
+          <a:ln w="9525">
+            <a:solidFill>
+              <a:srgbClr val="E5DFD0"/>
+            </a:solidFill>
+            <a:prstDash val="solid"/>
+          </a:ln>
+        </p:spPr>
+      </p:sp>
+      <p:sp>
+        <p:nvSpPr>
+          <p:cNvPr id="33" name="Shape 31"/>
+          <p:cNvSpPr/>
+          <p:nvPr/>
+        </p:nvSpPr>
+        <p:spPr>
+          <a:xfrm>
+            <a:off x="3528864" y="3596283"/>
+            <a:ext cx="0" cy="785515"/>
+          </a:xfrm>
+          <a:prstGeom prst="line">
+            <a:avLst/>
+          </a:prstGeom>
+          <a:noFill/>
+          <a:ln w="47625">
+            <a:solidFill>
+              <a:srgbClr val="C8943E"/>
+            </a:solidFill>
+            <a:prstDash val="solid"/>
+          </a:ln>
+        </p:spPr>
+      </p:sp>
+      <p:sp>
+        <p:nvSpPr>
+          <p:cNvPr id="34" name="Text 32"/>
+          <p:cNvSpPr/>
+          <p:nvPr/>
+        </p:nvSpPr>
+        <p:spPr>
+          <a:xfrm>
+            <a:off x="3755827" y="3758208"/>
+            <a:ext cx="7818093" cy="248989"/>
+          </a:xfrm>
+          <a:prstGeom prst="rect">
+            <a:avLst/>
+          </a:prstGeom>
+          <a:noFill/>
+          <a:ln/>
+        </p:spPr>
+        <p:txBody>
+          <a:bodyPr wrap="square" lIns="0" tIns="0" rIns="0" bIns="0" rtlCol="0" anchor="t"/>
+          <a:lstStyle/>
+          <a:p>
             <a:pPr algn="l" indent="0" marL="0">
               <a:lnSpc>
                 <a:spcPts val="1960"/>
@@ -16826,17 +17017,8 @@
                 <a:ea typeface="Noto Serif SC" pitchFamily="34" charset="-122"/>
                 <a:cs typeface="Noto Serif SC" pitchFamily="34" charset="-120"/>
               </a:rPr>
-              <a:t>弹钢琴，</a:t>
-            </a:r>
-            <a:pPr algn="l" indent="0" marL="0">
-              <a:lnSpc>
-                <a:spcPts val="1960"/>
-              </a:lnSpc>
-              <a:spcAft>
-                <a:spcPts val="400"/>
-              </a:spcAft>
-              <a:buNone/>
-            </a:pPr>
+              <a:t>她</a:t>
+            </a:r>
             <a:r>
               <a:rPr lang="en-US" sz="1400" b="1" dirty="0">
                 <a:solidFill>
@@ -16848,15 +17030,6 @@
               </a:rPr>
               <a:t>一边</a:t>
             </a:r>
-            <a:pPr algn="l" indent="0" marL="0">
-              <a:lnSpc>
-                <a:spcPts val="1960"/>
-              </a:lnSpc>
-              <a:spcAft>
-                <a:spcPts val="400"/>
-              </a:spcAft>
-              <a:buNone/>
-            </a:pPr>
             <a:r>
               <a:rPr lang="en-US" sz="1400" dirty="0">
                 <a:solidFill>
@@ -16866,573 +17039,19 @@
                 <a:ea typeface="Noto Serif SC" pitchFamily="34" charset="-122"/>
                 <a:cs typeface="Noto Serif SC" pitchFamily="34" charset="-120"/>
               </a:rPr>
-              <a:t>唱歌。</a:t>
-            </a:r>
-            <a:endParaRPr lang="en-US" sz="1400" dirty="0"/>
-          </a:p>
-        </p:txBody>
-      </p:sp>
-      <p:sp>
-        <p:nvSpPr>
-          <p:cNvPr id="21" name="Text 19"/>
-          <p:cNvSpPr/>
-          <p:nvPr/>
-        </p:nvSpPr>
-        <p:spPr>
-          <a:xfrm>
-            <a:off x="3755827" y="2182118"/>
-            <a:ext cx="7818093" cy="161925"/>
-          </a:xfrm>
-          <a:prstGeom prst="rect">
-            <a:avLst/>
-          </a:prstGeom>
-          <a:noFill/>
-          <a:ln/>
-        </p:spPr>
-        <p:txBody>
-          <a:bodyPr wrap="square" lIns="0" tIns="0" rIns="0" bIns="0" rtlCol="0" anchor="t"/>
-          <a:lstStyle/>
-          <a:p>
-            <a:pPr algn="l" indent="0" marL="0">
-              <a:buNone/>
-            </a:pPr>
-            <a:r>
-              <a:rPr lang="en-US" sz="900" dirty="0">
-                <a:solidFill>
-                  <a:srgbClr val="8B94A3"/>
-                </a:solidFill>
-                <a:latin typeface="Noto Sans SC" pitchFamily="34" charset="0"/>
-                <a:ea typeface="Noto Sans SC" pitchFamily="34" charset="-122"/>
-                <a:cs typeface="Noto Sans SC" pitchFamily="34" charset="-120"/>
-              </a:rPr>
-              <a:t>I like to play the piano while singing.</a:t>
-            </a:r>
-            <a:endParaRPr lang="en-US" sz="900" dirty="0"/>
-          </a:p>
-        </p:txBody>
-      </p:sp>
-      <p:sp>
-        <p:nvSpPr>
-          <p:cNvPr id="22" name="Text 20"/>
-          <p:cNvSpPr/>
-          <p:nvPr/>
-        </p:nvSpPr>
-        <p:spPr>
-          <a:xfrm>
-            <a:off x="3505051" y="2658368"/>
-            <a:ext cx="8128248" cy="785515"/>
-          </a:xfrm>
-          <a:prstGeom prst="roundRect">
-            <a:avLst>
-              <a:gd name="adj" fmla="val 12934"/>
-            </a:avLst>
-          </a:prstGeom>
-          <a:solidFill>
-            <a:srgbClr val="F6F2E8"/>
-          </a:solidFill>
-          <a:ln/>
-        </p:spPr>
-        <p:txBody>
-          <a:bodyPr wrap="square" rtlCol="0" anchor="ctr"/>
-          <a:lstStyle/>
-          <a:p>
-            <a:pPr indent="0" marL="0">
-              <a:buNone/>
-            </a:pPr>
-            <a:endParaRPr lang="en-US" dirty="0"/>
-          </a:p>
-        </p:txBody>
-      </p:sp>
-      <p:sp>
-        <p:nvSpPr>
-          <p:cNvPr id="23" name="Shape 21"/>
-          <p:cNvSpPr/>
-          <p:nvPr/>
-        </p:nvSpPr>
-        <p:spPr>
-          <a:xfrm>
-            <a:off x="3505051" y="2663130"/>
-            <a:ext cx="8128248" cy="0"/>
-          </a:xfrm>
-          <a:prstGeom prst="line">
-            <a:avLst/>
-          </a:prstGeom>
-          <a:noFill/>
-          <a:ln w="9525">
-            <a:solidFill>
-              <a:srgbClr val="E5DFD0"/>
-            </a:solidFill>
-            <a:prstDash val="solid"/>
-          </a:ln>
-        </p:spPr>
-      </p:sp>
-      <p:sp>
-        <p:nvSpPr>
-          <p:cNvPr id="24" name="Shape 22"/>
-          <p:cNvSpPr/>
-          <p:nvPr/>
-        </p:nvSpPr>
-        <p:spPr>
-          <a:xfrm>
-            <a:off x="11628537" y="2658368"/>
-            <a:ext cx="0" cy="785515"/>
-          </a:xfrm>
-          <a:prstGeom prst="line">
-            <a:avLst/>
-          </a:prstGeom>
-          <a:noFill/>
-          <a:ln w="9525">
-            <a:solidFill>
-              <a:srgbClr val="E5DFD0"/>
-            </a:solidFill>
-            <a:prstDash val="solid"/>
-          </a:ln>
-        </p:spPr>
-      </p:sp>
-      <p:sp>
-        <p:nvSpPr>
-          <p:cNvPr id="25" name="Shape 23"/>
-          <p:cNvSpPr/>
-          <p:nvPr/>
-        </p:nvSpPr>
-        <p:spPr>
-          <a:xfrm>
-            <a:off x="3505051" y="3439120"/>
-            <a:ext cx="8128248" cy="0"/>
-          </a:xfrm>
-          <a:prstGeom prst="line">
-            <a:avLst/>
-          </a:prstGeom>
-          <a:noFill/>
-          <a:ln w="9525">
-            <a:solidFill>
-              <a:srgbClr val="E5DFD0"/>
-            </a:solidFill>
-            <a:prstDash val="solid"/>
-          </a:ln>
-        </p:spPr>
-      </p:sp>
-      <p:sp>
-        <p:nvSpPr>
-          <p:cNvPr id="26" name="Shape 24"/>
-          <p:cNvSpPr/>
-          <p:nvPr/>
-        </p:nvSpPr>
-        <p:spPr>
-          <a:xfrm>
-            <a:off x="3528864" y="2658368"/>
-            <a:ext cx="0" cy="785515"/>
-          </a:xfrm>
-          <a:prstGeom prst="line">
-            <a:avLst/>
-          </a:prstGeom>
-          <a:noFill/>
-          <a:ln w="47625">
-            <a:solidFill>
-              <a:srgbClr val="C8943E"/>
-            </a:solidFill>
-            <a:prstDash val="solid"/>
-          </a:ln>
-        </p:spPr>
-      </p:sp>
-      <p:sp>
-        <p:nvSpPr>
-          <p:cNvPr id="27" name="Text 25"/>
-          <p:cNvSpPr/>
-          <p:nvPr/>
-        </p:nvSpPr>
-        <p:spPr>
-          <a:xfrm>
-            <a:off x="3755827" y="2820293"/>
-            <a:ext cx="7818093" cy="248989"/>
-          </a:xfrm>
-          <a:prstGeom prst="rect">
-            <a:avLst/>
-          </a:prstGeom>
-          <a:noFill/>
-          <a:ln/>
-        </p:spPr>
-        <p:txBody>
-          <a:bodyPr wrap="square" lIns="0" tIns="0" rIns="0" bIns="0" rtlCol="0" anchor="t"/>
-          <a:lstStyle/>
-          <a:p>
-            <a:pPr algn="l" indent="0" marL="0">
-              <a:lnSpc>
-                <a:spcPts val="1960"/>
-              </a:lnSpc>
-              <a:spcAft>
-                <a:spcPts val="400"/>
-              </a:spcAft>
-              <a:buNone/>
-            </a:pPr>
-            <a:r>
-              <a:rPr lang="en-US" sz="1400" dirty="0">
-                <a:solidFill>
-                  <a:srgbClr val="1E2A38"/>
+              <a:t>吃饭，</a:t>
+            </a:r>
+            <a:r>
+              <a:rPr lang="en-US" sz="1400" b="1" dirty="0">
+                <a:solidFill>
+                  <a:srgbClr val="C8943E"/>
                 </a:solidFill>
                 <a:latin typeface="Noto Serif SC" pitchFamily="34" charset="0"/>
                 <a:ea typeface="Noto Serif SC" pitchFamily="34" charset="-122"/>
                 <a:cs typeface="Noto Serif SC" pitchFamily="34" charset="-120"/>
               </a:rPr>
-              <a:t>他</a:t>
-            </a:r>
-            <a:pPr algn="l" indent="0" marL="0">
-              <a:lnSpc>
-                <a:spcPts val="1960"/>
-              </a:lnSpc>
-              <a:spcAft>
-                <a:spcPts val="400"/>
-              </a:spcAft>
-              <a:buNone/>
-            </a:pPr>
-            <a:r>
-              <a:rPr lang="en-US" sz="1400" b="1" dirty="0">
-                <a:solidFill>
-                  <a:srgbClr val="C8943E"/>
-                </a:solidFill>
-                <a:latin typeface="Noto Serif SC" pitchFamily="34" charset="0"/>
-                <a:ea typeface="Noto Serif SC" pitchFamily="34" charset="-122"/>
-                <a:cs typeface="Noto Serif SC" pitchFamily="34" charset="-120"/>
-              </a:rPr>
               <a:t>一边</a:t>
             </a:r>
-            <a:pPr algn="l" indent="0" marL="0">
-              <a:lnSpc>
-                <a:spcPts val="1960"/>
-              </a:lnSpc>
-              <a:spcAft>
-                <a:spcPts val="400"/>
-              </a:spcAft>
-              <a:buNone/>
-            </a:pPr>
-            <a:r>
-              <a:rPr lang="en-US" sz="1400" dirty="0">
-                <a:solidFill>
-                  <a:srgbClr val="1E2A38"/>
-                </a:solidFill>
-                <a:latin typeface="Noto Serif SC" pitchFamily="34" charset="0"/>
-                <a:ea typeface="Noto Serif SC" pitchFamily="34" charset="-122"/>
-                <a:cs typeface="Noto Serif SC" pitchFamily="34" charset="-120"/>
-              </a:rPr>
-              <a:t>听音乐，</a:t>
-            </a:r>
-            <a:pPr algn="l" indent="0" marL="0">
-              <a:lnSpc>
-                <a:spcPts val="1960"/>
-              </a:lnSpc>
-              <a:spcAft>
-                <a:spcPts val="400"/>
-              </a:spcAft>
-              <a:buNone/>
-            </a:pPr>
-            <a:r>
-              <a:rPr lang="en-US" sz="1400" b="1" dirty="0">
-                <a:solidFill>
-                  <a:srgbClr val="C8943E"/>
-                </a:solidFill>
-                <a:latin typeface="Noto Serif SC" pitchFamily="34" charset="0"/>
-                <a:ea typeface="Noto Serif SC" pitchFamily="34" charset="-122"/>
-                <a:cs typeface="Noto Serif SC" pitchFamily="34" charset="-120"/>
-              </a:rPr>
-              <a:t>一边</a:t>
-            </a:r>
-            <a:pPr algn="l" indent="0" marL="0">
-              <a:lnSpc>
-                <a:spcPts val="1960"/>
-              </a:lnSpc>
-              <a:spcAft>
-                <a:spcPts val="400"/>
-              </a:spcAft>
-              <a:buNone/>
-            </a:pPr>
-            <a:r>
-              <a:rPr lang="en-US" sz="1400" dirty="0">
-                <a:solidFill>
-                  <a:srgbClr val="1E2A38"/>
-                </a:solidFill>
-                <a:latin typeface="Noto Serif SC" pitchFamily="34" charset="0"/>
-                <a:ea typeface="Noto Serif SC" pitchFamily="34" charset="-122"/>
-                <a:cs typeface="Noto Serif SC" pitchFamily="34" charset="-120"/>
-              </a:rPr>
-              <a:t>读书。</a:t>
-            </a:r>
-            <a:endParaRPr lang="en-US" sz="1400" dirty="0"/>
-          </a:p>
-        </p:txBody>
-      </p:sp>
-      <p:sp>
-        <p:nvSpPr>
-          <p:cNvPr id="28" name="Text 26"/>
-          <p:cNvSpPr/>
-          <p:nvPr/>
-        </p:nvSpPr>
-        <p:spPr>
-          <a:xfrm>
-            <a:off x="3755827" y="3120033"/>
-            <a:ext cx="7818093" cy="161925"/>
-          </a:xfrm>
-          <a:prstGeom prst="rect">
-            <a:avLst/>
-          </a:prstGeom>
-          <a:noFill/>
-          <a:ln/>
-        </p:spPr>
-        <p:txBody>
-          <a:bodyPr wrap="square" lIns="0" tIns="0" rIns="0" bIns="0" rtlCol="0" anchor="t"/>
-          <a:lstStyle/>
-          <a:p>
-            <a:pPr algn="l" indent="0" marL="0">
-              <a:buNone/>
-            </a:pPr>
-            <a:r>
-              <a:rPr lang="en-US" sz="900" dirty="0">
-                <a:solidFill>
-                  <a:srgbClr val="8B94A3"/>
-                </a:solidFill>
-                <a:latin typeface="Noto Sans SC" pitchFamily="34" charset="0"/>
-                <a:ea typeface="Noto Sans SC" pitchFamily="34" charset="-122"/>
-                <a:cs typeface="Noto Sans SC" pitchFamily="34" charset="-120"/>
-              </a:rPr>
-              <a:t>He listens to music while reading.</a:t>
-            </a:r>
-            <a:endParaRPr lang="en-US" sz="900" dirty="0"/>
-          </a:p>
-        </p:txBody>
-      </p:sp>
-      <p:sp>
-        <p:nvSpPr>
-          <p:cNvPr id="29" name="Text 27"/>
-          <p:cNvSpPr/>
-          <p:nvPr/>
-        </p:nvSpPr>
-        <p:spPr>
-          <a:xfrm>
-            <a:off x="3505051" y="3596283"/>
-            <a:ext cx="8128248" cy="785515"/>
-          </a:xfrm>
-          <a:prstGeom prst="roundRect">
-            <a:avLst>
-              <a:gd name="adj" fmla="val 12934"/>
-            </a:avLst>
-          </a:prstGeom>
-          <a:solidFill>
-            <a:srgbClr val="F6F2E8"/>
-          </a:solidFill>
-          <a:ln/>
-        </p:spPr>
-        <p:txBody>
-          <a:bodyPr wrap="square" rtlCol="0" anchor="ctr"/>
-          <a:lstStyle/>
-          <a:p>
-            <a:pPr indent="0" marL="0">
-              <a:buNone/>
-            </a:pPr>
-            <a:endParaRPr lang="en-US" dirty="0"/>
-          </a:p>
-        </p:txBody>
-      </p:sp>
-      <p:sp>
-        <p:nvSpPr>
-          <p:cNvPr id="30" name="Shape 28"/>
-          <p:cNvSpPr/>
-          <p:nvPr/>
-        </p:nvSpPr>
-        <p:spPr>
-          <a:xfrm>
-            <a:off x="3505051" y="3601045"/>
-            <a:ext cx="8128248" cy="0"/>
-          </a:xfrm>
-          <a:prstGeom prst="line">
-            <a:avLst/>
-          </a:prstGeom>
-          <a:noFill/>
-          <a:ln w="9525">
-            <a:solidFill>
-              <a:srgbClr val="E5DFD0"/>
-            </a:solidFill>
-            <a:prstDash val="solid"/>
-          </a:ln>
-        </p:spPr>
-      </p:sp>
-      <p:sp>
-        <p:nvSpPr>
-          <p:cNvPr id="31" name="Shape 29"/>
-          <p:cNvSpPr/>
-          <p:nvPr/>
-        </p:nvSpPr>
-        <p:spPr>
-          <a:xfrm>
-            <a:off x="11628537" y="3596283"/>
-            <a:ext cx="0" cy="785515"/>
-          </a:xfrm>
-          <a:prstGeom prst="line">
-            <a:avLst/>
-          </a:prstGeom>
-          <a:noFill/>
-          <a:ln w="9525">
-            <a:solidFill>
-              <a:srgbClr val="E5DFD0"/>
-            </a:solidFill>
-            <a:prstDash val="solid"/>
-          </a:ln>
-        </p:spPr>
-      </p:sp>
-      <p:sp>
-        <p:nvSpPr>
-          <p:cNvPr id="32" name="Shape 30"/>
-          <p:cNvSpPr/>
-          <p:nvPr/>
-        </p:nvSpPr>
-        <p:spPr>
-          <a:xfrm>
-            <a:off x="3505051" y="4377035"/>
-            <a:ext cx="8128248" cy="0"/>
-          </a:xfrm>
-          <a:prstGeom prst="line">
-            <a:avLst/>
-          </a:prstGeom>
-          <a:noFill/>
-          <a:ln w="9525">
-            <a:solidFill>
-              <a:srgbClr val="E5DFD0"/>
-            </a:solidFill>
-            <a:prstDash val="solid"/>
-          </a:ln>
-        </p:spPr>
-      </p:sp>
-      <p:sp>
-        <p:nvSpPr>
-          <p:cNvPr id="33" name="Shape 31"/>
-          <p:cNvSpPr/>
-          <p:nvPr/>
-        </p:nvSpPr>
-        <p:spPr>
-          <a:xfrm>
-            <a:off x="3528864" y="3596283"/>
-            <a:ext cx="0" cy="785515"/>
-          </a:xfrm>
-          <a:prstGeom prst="line">
-            <a:avLst/>
-          </a:prstGeom>
-          <a:noFill/>
-          <a:ln w="47625">
-            <a:solidFill>
-              <a:srgbClr val="C8943E"/>
-            </a:solidFill>
-            <a:prstDash val="solid"/>
-          </a:ln>
-        </p:spPr>
-      </p:sp>
-      <p:sp>
-        <p:nvSpPr>
-          <p:cNvPr id="34" name="Text 32"/>
-          <p:cNvSpPr/>
-          <p:nvPr/>
-        </p:nvSpPr>
-        <p:spPr>
-          <a:xfrm>
-            <a:off x="3755827" y="3758208"/>
-            <a:ext cx="7818093" cy="248989"/>
-          </a:xfrm>
-          <a:prstGeom prst="rect">
-            <a:avLst/>
-          </a:prstGeom>
-          <a:noFill/>
-          <a:ln/>
-        </p:spPr>
-        <p:txBody>
-          <a:bodyPr wrap="square" lIns="0" tIns="0" rIns="0" bIns="0" rtlCol="0" anchor="t"/>
-          <a:lstStyle/>
-          <a:p>
-            <a:pPr algn="l" indent="0" marL="0">
-              <a:lnSpc>
-                <a:spcPts val="1960"/>
-              </a:lnSpc>
-              <a:spcAft>
-                <a:spcPts val="400"/>
-              </a:spcAft>
-              <a:buNone/>
-            </a:pPr>
-            <a:r>
-              <a:rPr lang="en-US" sz="1400" dirty="0">
-                <a:solidFill>
-                  <a:srgbClr val="1E2A38"/>
-                </a:solidFill>
-                <a:latin typeface="Noto Serif SC" pitchFamily="34" charset="0"/>
-                <a:ea typeface="Noto Serif SC" pitchFamily="34" charset="-122"/>
-                <a:cs typeface="Noto Serif SC" pitchFamily="34" charset="-120"/>
-              </a:rPr>
-              <a:t>她</a:t>
-            </a:r>
-            <a:pPr algn="l" indent="0" marL="0">
-              <a:lnSpc>
-                <a:spcPts val="1960"/>
-              </a:lnSpc>
-              <a:spcAft>
-                <a:spcPts val="400"/>
-              </a:spcAft>
-              <a:buNone/>
-            </a:pPr>
-            <a:r>
-              <a:rPr lang="en-US" sz="1400" b="1" dirty="0">
-                <a:solidFill>
-                  <a:srgbClr val="C8943E"/>
-                </a:solidFill>
-                <a:latin typeface="Noto Serif SC" pitchFamily="34" charset="0"/>
-                <a:ea typeface="Noto Serif SC" pitchFamily="34" charset="-122"/>
-                <a:cs typeface="Noto Serif SC" pitchFamily="34" charset="-120"/>
-              </a:rPr>
-              <a:t>一边</a:t>
-            </a:r>
-            <a:pPr algn="l" indent="0" marL="0">
-              <a:lnSpc>
-                <a:spcPts val="1960"/>
-              </a:lnSpc>
-              <a:spcAft>
-                <a:spcPts val="400"/>
-              </a:spcAft>
-              <a:buNone/>
-            </a:pPr>
-            <a:r>
-              <a:rPr lang="en-US" sz="1400" dirty="0">
-                <a:solidFill>
-                  <a:srgbClr val="1E2A38"/>
-                </a:solidFill>
-                <a:latin typeface="Noto Serif SC" pitchFamily="34" charset="0"/>
-                <a:ea typeface="Noto Serif SC" pitchFamily="34" charset="-122"/>
-                <a:cs typeface="Noto Serif SC" pitchFamily="34" charset="-120"/>
-              </a:rPr>
-              <a:t>吃饭，</a:t>
-            </a:r>
-            <a:pPr algn="l" indent="0" marL="0">
-              <a:lnSpc>
-                <a:spcPts val="1960"/>
-              </a:lnSpc>
-              <a:spcAft>
-                <a:spcPts val="400"/>
-              </a:spcAft>
-              <a:buNone/>
-            </a:pPr>
-            <a:r>
-              <a:rPr lang="en-US" sz="1400" b="1" dirty="0">
-                <a:solidFill>
-                  <a:srgbClr val="C8943E"/>
-                </a:solidFill>
-                <a:latin typeface="Noto Serif SC" pitchFamily="34" charset="0"/>
-                <a:ea typeface="Noto Serif SC" pitchFamily="34" charset="-122"/>
-                <a:cs typeface="Noto Serif SC" pitchFamily="34" charset="-120"/>
-              </a:rPr>
-              <a:t>一边</a:t>
-            </a:r>
-            <a:pPr algn="l" indent="0" marL="0">
-              <a:lnSpc>
-                <a:spcPts val="1960"/>
-              </a:lnSpc>
-              <a:spcAft>
-                <a:spcPts val="400"/>
-              </a:spcAft>
-              <a:buNone/>
-            </a:pPr>
             <a:r>
               <a:rPr lang="en-US" sz="1400" dirty="0">
                 <a:solidFill>
@@ -17606,15 +17225,6 @@
               </a:rPr>
               <a:t>Same person, same time</a:t>
             </a:r>
-            <a:pPr algn="l" indent="0" marL="0">
-              <a:lnSpc>
-                <a:spcPts val="1378"/>
-              </a:lnSpc>
-              <a:spcAft>
-                <a:spcPts val="800"/>
-              </a:spcAft>
-              <a:buNone/>
-            </a:pPr>
             <a:r>
               <a:rPr lang="en-US" sz="950" dirty="0">
                 <a:solidFill>
@@ -20510,12 +20120,6 @@
               </a:rPr>
               <a:t>✓ </a:t>
             </a:r>
-            <a:pPr algn="l" indent="0" marL="0">
-              <a:spcAft>
-                <a:spcPts val="300"/>
-              </a:spcAft>
-              <a:buNone/>
-            </a:pPr>
             <a:r>
               <a:rPr lang="en-US" sz="950" b="1" dirty="0">
                 <a:solidFill>
@@ -21149,15 +20753,6 @@
               </a:rPr>
               <a:t>一边</a:t>
             </a:r>
-            <a:pPr algn="l" indent="0" marL="0">
-              <a:lnSpc>
-                <a:spcPts val="3200"/>
-              </a:lnSpc>
-              <a:spcAft>
-                <a:spcPts val="1200"/>
-              </a:spcAft>
-              <a:buNone/>
-            </a:pPr>
             <a:r>
               <a:rPr lang="en-US" sz="1600" dirty="0">
                 <a:solidFill>
@@ -21169,15 +20764,6 @@
               </a:rPr>
               <a:t>弹钢琴，</a:t>
             </a:r>
-            <a:pPr algn="l" indent="0" marL="0">
-              <a:lnSpc>
-                <a:spcPts val="3200"/>
-              </a:lnSpc>
-              <a:spcAft>
-                <a:spcPts val="1200"/>
-              </a:spcAft>
-              <a:buNone/>
-            </a:pPr>
             <a:r>
               <a:rPr lang="en-US" sz="1600" b="1" dirty="0">
                 <a:solidFill>
@@ -21189,15 +20775,6 @@
               </a:rPr>
               <a:t>一边</a:t>
             </a:r>
-            <a:pPr algn="l" indent="0" marL="0">
-              <a:lnSpc>
-                <a:spcPts val="3200"/>
-              </a:lnSpc>
-              <a:spcAft>
-                <a:spcPts val="1200"/>
-              </a:spcAft>
-              <a:buNone/>
-            </a:pPr>
             <a:r>
               <a:rPr lang="en-US" sz="1600" dirty="0">
                 <a:solidFill>
@@ -21831,6 +21408,54 @@
               </a:rPr>
               <a:t>Q1</a:t>
             </a:r>
+            <a:r>
+              <a:rPr lang="en-US" sz="1050" dirty="0">
+                <a:solidFill>
+                  <a:srgbClr val="1E2A38"/>
+                </a:solidFill>
+                <a:latin typeface="Noto Sans SC" pitchFamily="34" charset="0"/>
+                <a:ea typeface="Noto Sans SC" pitchFamily="34" charset="-122"/>
+                <a:cs typeface="Noto Sans SC" pitchFamily="34" charset="-120"/>
+              </a:rPr>
+              <a:t>田云有什么爱好？
+</a:t>
+            </a:r>
+            <a:r>
+              <a:rPr lang="en-US" sz="850" i="1" dirty="0">
+                <a:solidFill>
+                  <a:srgbClr val="8B94A3"/>
+                </a:solidFill>
+                <a:latin typeface="Noto Sans SC" pitchFamily="34" charset="0"/>
+                <a:ea typeface="Noto Sans SC" pitchFamily="34" charset="-122"/>
+                <a:cs typeface="Noto Sans SC" pitchFamily="34" charset="-120"/>
+              </a:rPr>
+              <a:t>What are 田云's hobbies?</a:t>
+            </a:r>
+            <a:endParaRPr lang="en-US" sz="1050" dirty="0"/>
+          </a:p>
+        </p:txBody>
+      </p:sp>
+      <p:sp>
+        <p:nvSpPr>
+          <p:cNvPr id="29" name="Text 27"/>
+          <p:cNvSpPr/>
+          <p:nvPr/>
+        </p:nvSpPr>
+        <p:spPr>
+          <a:xfrm>
+            <a:off x="9052024" y="3901380"/>
+            <a:ext cx="2415972" cy="600075"/>
+          </a:xfrm>
+          <a:prstGeom prst="rect">
+            <a:avLst/>
+          </a:prstGeom>
+          <a:noFill/>
+          <a:ln/>
+        </p:spPr>
+        <p:txBody>
+          <a:bodyPr wrap="square" lIns="0" tIns="0" rIns="0" bIns="0" rtlCol="0" anchor="t"/>
+          <a:lstStyle/>
+          <a:p>
             <a:pPr algn="l" indent="0" marL="0">
               <a:lnSpc>
                 <a:spcPts val="1575"/>
@@ -21841,6 +21466,17 @@
               <a:buNone/>
             </a:pPr>
             <a:r>
+              <a:rPr lang="en-US" sz="1050" b="1" dirty="0">
+                <a:solidFill>
+                  <a:srgbClr val="3A7D8C"/>
+                </a:solidFill>
+                <a:latin typeface="Noto Sans SC" pitchFamily="34" charset="0"/>
+                <a:ea typeface="Noto Sans SC" pitchFamily="34" charset="-122"/>
+                <a:cs typeface="Noto Sans SC" pitchFamily="34" charset="-120"/>
+              </a:rPr>
+              <a:t>Q2</a:t>
+            </a:r>
+            <a:r>
               <a:rPr lang="en-US" sz="1050" dirty="0">
                 <a:solidFill>
                   <a:srgbClr val="1E2A38"/>
@@ -21849,61 +21485,49 @@
                 <a:ea typeface="Noto Sans SC" pitchFamily="34" charset="-122"/>
                 <a:cs typeface="Noto Sans SC" pitchFamily="34" charset="-120"/>
               </a:rPr>
-              <a:t>田云有什么爱好？
+              <a:t>她每天读几个小时的书？
 </a:t>
             </a:r>
+            <a:r>
+              <a:rPr lang="en-US" sz="850" i="1" dirty="0">
+                <a:solidFill>
+                  <a:srgbClr val="8B94A3"/>
+                </a:solidFill>
+                <a:latin typeface="Noto Sans SC" pitchFamily="34" charset="0"/>
+                <a:ea typeface="Noto Sans SC" pitchFamily="34" charset="-122"/>
+                <a:cs typeface="Noto Sans SC" pitchFamily="34" charset="-120"/>
+              </a:rPr>
+              <a:t>How many hours does she read each day?</a:t>
+            </a:r>
+            <a:endParaRPr lang="en-US" sz="1050" dirty="0"/>
+          </a:p>
+        </p:txBody>
+      </p:sp>
+      <p:sp>
+        <p:nvSpPr>
+          <p:cNvPr id="30" name="Text 28"/>
+          <p:cNvSpPr/>
+          <p:nvPr/>
+        </p:nvSpPr>
+        <p:spPr>
+          <a:xfrm>
+            <a:off x="9052024" y="4602956"/>
+            <a:ext cx="2415972" cy="400050"/>
+          </a:xfrm>
+          <a:prstGeom prst="rect">
+            <a:avLst/>
+          </a:prstGeom>
+          <a:noFill/>
+          <a:ln/>
+        </p:spPr>
+        <p:txBody>
+          <a:bodyPr wrap="square" lIns="0" tIns="0" rIns="0" bIns="0" rtlCol="0" anchor="t"/>
+          <a:lstStyle/>
+          <a:p>
             <a:pPr algn="l" indent="0" marL="0">
               <a:lnSpc>
                 <a:spcPts val="1575"/>
               </a:lnSpc>
-              <a:spcAft>
-                <a:spcPts val="800"/>
-              </a:spcAft>
-              <a:buNone/>
-            </a:pPr>
-            <a:r>
-              <a:rPr lang="en-US" sz="850" i="1" dirty="0">
-                <a:solidFill>
-                  <a:srgbClr val="8B94A3"/>
-                </a:solidFill>
-                <a:latin typeface="Noto Sans SC" pitchFamily="34" charset="0"/>
-                <a:ea typeface="Noto Sans SC" pitchFamily="34" charset="-122"/>
-                <a:cs typeface="Noto Sans SC" pitchFamily="34" charset="-120"/>
-              </a:rPr>
-              <a:t>What are 田云's hobbies?</a:t>
-            </a:r>
-            <a:endParaRPr lang="en-US" sz="1050" dirty="0"/>
-          </a:p>
-        </p:txBody>
-      </p:sp>
-      <p:sp>
-        <p:nvSpPr>
-          <p:cNvPr id="29" name="Text 27"/>
-          <p:cNvSpPr/>
-          <p:nvPr/>
-        </p:nvSpPr>
-        <p:spPr>
-          <a:xfrm>
-            <a:off x="9052024" y="3901380"/>
-            <a:ext cx="2415972" cy="600075"/>
-          </a:xfrm>
-          <a:prstGeom prst="rect">
-            <a:avLst/>
-          </a:prstGeom>
-          <a:noFill/>
-          <a:ln/>
-        </p:spPr>
-        <p:txBody>
-          <a:bodyPr wrap="square" lIns="0" tIns="0" rIns="0" bIns="0" rtlCol="0" anchor="t"/>
-          <a:lstStyle/>
-          <a:p>
-            <a:pPr algn="l" indent="0" marL="0">
-              <a:lnSpc>
-                <a:spcPts val="1575"/>
-              </a:lnSpc>
-              <a:spcAft>
-                <a:spcPts val="800"/>
-              </a:spcAft>
               <a:buNone/>
             </a:pPr>
             <a:r>
@@ -21915,97 +21539,8 @@
                 <a:ea typeface="Noto Sans SC" pitchFamily="34" charset="-122"/>
                 <a:cs typeface="Noto Sans SC" pitchFamily="34" charset="-120"/>
               </a:rPr>
-              <a:t>Q2</a:t>
-            </a:r>
-            <a:pPr algn="l" indent="0" marL="0">
-              <a:lnSpc>
-                <a:spcPts val="1575"/>
-              </a:lnSpc>
-              <a:spcAft>
-                <a:spcPts val="800"/>
-              </a:spcAft>
-              <a:buNone/>
-            </a:pPr>
-            <a:r>
-              <a:rPr lang="en-US" sz="1050" dirty="0">
-                <a:solidFill>
-                  <a:srgbClr val="1E2A38"/>
-                </a:solidFill>
-                <a:latin typeface="Noto Sans SC" pitchFamily="34" charset="0"/>
-                <a:ea typeface="Noto Sans SC" pitchFamily="34" charset="-122"/>
-                <a:cs typeface="Noto Sans SC" pitchFamily="34" charset="-120"/>
-              </a:rPr>
-              <a:t>她每天读几个小时的书？
-</a:t>
-            </a:r>
-            <a:pPr algn="l" indent="0" marL="0">
-              <a:lnSpc>
-                <a:spcPts val="1575"/>
-              </a:lnSpc>
-              <a:spcAft>
-                <a:spcPts val="800"/>
-              </a:spcAft>
-              <a:buNone/>
-            </a:pPr>
-            <a:r>
-              <a:rPr lang="en-US" sz="850" i="1" dirty="0">
-                <a:solidFill>
-                  <a:srgbClr val="8B94A3"/>
-                </a:solidFill>
-                <a:latin typeface="Noto Sans SC" pitchFamily="34" charset="0"/>
-                <a:ea typeface="Noto Sans SC" pitchFamily="34" charset="-122"/>
-                <a:cs typeface="Noto Sans SC" pitchFamily="34" charset="-120"/>
-              </a:rPr>
-              <a:t>How many hours does she read each day?</a:t>
-            </a:r>
-            <a:endParaRPr lang="en-US" sz="1050" dirty="0"/>
-          </a:p>
-        </p:txBody>
-      </p:sp>
-      <p:sp>
-        <p:nvSpPr>
-          <p:cNvPr id="30" name="Text 28"/>
-          <p:cNvSpPr/>
-          <p:nvPr/>
-        </p:nvSpPr>
-        <p:spPr>
-          <a:xfrm>
-            <a:off x="9052024" y="4602956"/>
-            <a:ext cx="2415972" cy="400050"/>
-          </a:xfrm>
-          <a:prstGeom prst="rect">
-            <a:avLst/>
-          </a:prstGeom>
-          <a:noFill/>
-          <a:ln/>
-        </p:spPr>
-        <p:txBody>
-          <a:bodyPr wrap="square" lIns="0" tIns="0" rIns="0" bIns="0" rtlCol="0" anchor="t"/>
-          <a:lstStyle/>
-          <a:p>
-            <a:pPr algn="l" indent="0" marL="0">
-              <a:lnSpc>
-                <a:spcPts val="1575"/>
-              </a:lnSpc>
-              <a:buNone/>
-            </a:pPr>
-            <a:r>
-              <a:rPr lang="en-US" sz="1050" b="1" dirty="0">
-                <a:solidFill>
-                  <a:srgbClr val="3A7D8C"/>
-                </a:solidFill>
-                <a:latin typeface="Noto Sans SC" pitchFamily="34" charset="0"/>
-                <a:ea typeface="Noto Sans SC" pitchFamily="34" charset="-122"/>
-                <a:cs typeface="Noto Sans SC" pitchFamily="34" charset="-120"/>
-              </a:rPr>
               <a:t>Q3</a:t>
             </a:r>
-            <a:pPr algn="l" indent="0" marL="0">
-              <a:lnSpc>
-                <a:spcPts val="1575"/>
-              </a:lnSpc>
-              <a:buNone/>
-            </a:pPr>
             <a:r>
               <a:rPr lang="en-US" sz="1050" dirty="0">
                 <a:solidFill>
@@ -22732,12 +22267,6 @@
               </a:rPr>
               <a:t>我喜欢</a:t>
             </a:r>
-            <a:pPr algn="l" indent="0" marL="0">
-              <a:lnSpc>
-                <a:spcPts val="2240"/>
-              </a:lnSpc>
-              <a:buNone/>
-            </a:pPr>
             <a:r>
               <a:rPr lang="en-US" sz="1400" b="1" dirty="0">
                 <a:solidFill>
@@ -22749,12 +22278,6 @@
               </a:rPr>
               <a:t>一边</a:t>
             </a:r>
-            <a:pPr algn="l" indent="0" marL="0">
-              <a:lnSpc>
-                <a:spcPts val="2240"/>
-              </a:lnSpc>
-              <a:buNone/>
-            </a:pPr>
             <a:r>
               <a:rPr lang="en-US" sz="1400" dirty="0">
                 <a:solidFill>
@@ -22766,12 +22289,6 @@
               </a:rPr>
               <a:t>弹钢琴，</a:t>
             </a:r>
-            <a:pPr algn="l" indent="0" marL="0">
-              <a:lnSpc>
-                <a:spcPts val="2240"/>
-              </a:lnSpc>
-              <a:buNone/>
-            </a:pPr>
             <a:r>
               <a:rPr lang="en-US" sz="1400" b="1" dirty="0">
                 <a:solidFill>
@@ -22783,12 +22300,6 @@
               </a:rPr>
               <a:t>一边</a:t>
             </a:r>
-            <a:pPr algn="l" indent="0" marL="0">
-              <a:lnSpc>
-                <a:spcPts val="2240"/>
-              </a:lnSpc>
-              <a:buNone/>
-            </a:pPr>
             <a:r>
               <a:rPr lang="en-US" sz="1400" dirty="0">
                 <a:solidFill>
@@ -23134,15 +22645,6 @@
               </a:rPr>
               <a:t>Read together </a:t>
             </a:r>
-            <a:pPr algn="l" indent="0" marL="0">
-              <a:lnSpc>
-                <a:spcPts val="1450"/>
-              </a:lnSpc>
-              <a:spcAft>
-                <a:spcPts val="700"/>
-              </a:spcAft>
-              <a:buNone/>
-            </a:pPr>
             <a:r>
               <a:rPr lang="en-US" sz="1000" b="1" dirty="0">
                 <a:solidFill>
@@ -23154,15 +22656,6 @@
               </a:rPr>
               <a:t>twice</a:t>
             </a:r>
-            <a:pPr algn="l" indent="0" marL="0">
-              <a:lnSpc>
-                <a:spcPts val="1450"/>
-              </a:lnSpc>
-              <a:spcAft>
-                <a:spcPts val="700"/>
-              </a:spcAft>
-              <a:buNone/>
-            </a:pPr>
             <a:r>
               <a:rPr lang="en-US" sz="1000" dirty="0">
                 <a:solidFill>
@@ -23198,15 +22691,6 @@
               </a:rPr>
               <a:t>Partner A reads aloud — Partner B listens and </a:t>
             </a:r>
-            <a:pPr algn="l" indent="0" marL="0">
-              <a:lnSpc>
-                <a:spcPts val="1450"/>
-              </a:lnSpc>
-              <a:spcAft>
-                <a:spcPts val="700"/>
-              </a:spcAft>
-              <a:buNone/>
-            </a:pPr>
             <a:r>
               <a:rPr lang="en-US" sz="1000" b="1" dirty="0">
                 <a:solidFill>
@@ -23242,15 +22726,6 @@
               </a:rPr>
               <a:t>Swap roles</a:t>
             </a:r>
-            <a:pPr algn="l" indent="0" marL="0">
-              <a:lnSpc>
-                <a:spcPts val="1450"/>
-              </a:lnSpc>
-              <a:spcAft>
-                <a:spcPts val="700"/>
-              </a:spcAft>
-              <a:buNone/>
-            </a:pPr>
             <a:r>
               <a:rPr lang="en-US" sz="1000" dirty="0">
                 <a:solidFill>
@@ -23286,15 +22761,6 @@
               </a:rPr>
               <a:t>Focus on </a:t>
             </a:r>
-            <a:pPr algn="l" indent="0" marL="0">
-              <a:lnSpc>
-                <a:spcPts val="1450"/>
-              </a:lnSpc>
-              <a:spcAft>
-                <a:spcPts val="700"/>
-              </a:spcAft>
-              <a:buNone/>
-            </a:pPr>
             <a:r>
               <a:rPr lang="en-US" sz="1000" b="1" dirty="0">
                 <a:solidFill>
@@ -23306,15 +22772,6 @@
               </a:rPr>
               <a:t>tone and rhythm</a:t>
             </a:r>
-            <a:pPr algn="l" indent="0" marL="0">
-              <a:lnSpc>
-                <a:spcPts val="1450"/>
-              </a:lnSpc>
-              <a:spcAft>
-                <a:spcPts val="700"/>
-              </a:spcAft>
-              <a:buNone/>
-            </a:pPr>
             <a:r>
               <a:rPr lang="en-US" sz="1000" dirty="0">
                 <a:solidFill>
@@ -24770,9 +24227,6 @@
               </a:rPr>
               <a:t>＿＿＿</a:t>
             </a:r>
-            <a:pPr algn="l" indent="0" marL="0">
-              <a:buNone/>
-            </a:pPr>
             <a:r>
               <a:rPr lang="en-US" sz="1400" dirty="0">
                 <a:solidFill>
@@ -24784,9 +24238,6 @@
               </a:rPr>
               <a:t> 喜欢 </a:t>
             </a:r>
-            <a:pPr algn="l" indent="0" marL="0">
-              <a:buNone/>
-            </a:pPr>
             <a:r>
               <a:rPr lang="en-US" sz="1400" b="1" dirty="0">
                 <a:solidFill>
@@ -24798,9 +24249,6 @@
               </a:rPr>
               <a:t>一边</a:t>
             </a:r>
-            <a:pPr algn="l" indent="0" marL="0">
-              <a:buNone/>
-            </a:pPr>
             <a:r>
               <a:rPr lang="en-US" sz="1400" dirty="0">
                 <a:solidFill>
@@ -24812,9 +24260,6 @@
               </a:rPr>
               <a:t> </a:t>
             </a:r>
-            <a:pPr algn="l" indent="0" marL="0">
-              <a:buNone/>
-            </a:pPr>
             <a:r>
               <a:rPr lang="en-US" sz="1400" b="1" dirty="0">
                 <a:solidFill>
@@ -24826,9 +24271,6 @@
               </a:rPr>
               <a:t>＿＿＿</a:t>
             </a:r>
-            <a:pPr algn="l" indent="0" marL="0">
-              <a:buNone/>
-            </a:pPr>
             <a:r>
               <a:rPr lang="en-US" sz="1400" dirty="0">
                 <a:solidFill>
@@ -24840,9 +24282,6 @@
               </a:rPr>
               <a:t>，</a:t>
             </a:r>
-            <a:pPr algn="l" indent="0" marL="0">
-              <a:buNone/>
-            </a:pPr>
             <a:r>
               <a:rPr lang="en-US" sz="1400" b="1" dirty="0">
                 <a:solidFill>
@@ -24854,9 +24293,6 @@
               </a:rPr>
               <a:t>一边</a:t>
             </a:r>
-            <a:pPr algn="l" indent="0" marL="0">
-              <a:buNone/>
-            </a:pPr>
             <a:r>
               <a:rPr lang="en-US" sz="1400" dirty="0">
                 <a:solidFill>
@@ -24868,9 +24304,6 @@
               </a:rPr>
               <a:t> </a:t>
             </a:r>
-            <a:pPr algn="l" indent="0" marL="0">
-              <a:buNone/>
-            </a:pPr>
             <a:r>
               <a:rPr lang="en-US" sz="1400" b="1" dirty="0">
                 <a:solidFill>
@@ -24882,9 +24315,6 @@
               </a:rPr>
               <a:t>＿＿＿</a:t>
             </a:r>
-            <a:pPr algn="l" indent="0" marL="0">
-              <a:buNone/>
-            </a:pPr>
             <a:r>
               <a:rPr lang="en-US" sz="1400" dirty="0">
                 <a:solidFill>
@@ -24935,9 +24365,6 @@
               </a:rPr>
               <a:t>Teacher models</a:t>
             </a:r>
-            <a:pPr algn="l" indent="0" marL="0">
-              <a:buNone/>
-            </a:pPr>
             <a:r>
               <a:rPr lang="en-US" sz="900" dirty="0">
                 <a:solidFill>
@@ -24949,9 +24376,6 @@
               </a:rPr>
               <a:t> pictures 1–2 | </a:t>
             </a:r>
-            <a:pPr algn="l" indent="0" marL="0">
-              <a:buNone/>
-            </a:pPr>
             <a:r>
               <a:rPr lang="en-US" sz="900" b="1" dirty="0">
                 <a:solidFill>
@@ -24963,9 +24387,6 @@
               </a:rPr>
               <a:t>Students do</a:t>
             </a:r>
-            <a:pPr algn="l" indent="0" marL="0">
-              <a:buNone/>
-            </a:pPr>
             <a:r>
               <a:rPr lang="en-US" sz="900" dirty="0">
                 <a:solidFill>
